--- a/MYQStudio_GCP_Architecture.pptx
+++ b/MYQStudio_GCP_Architecture.pptx
@@ -4,6 +4,9 @@
   <p:sldMasterIdLst>
     <p:sldMasterId id="2147483648" r:id="rId1"/>
   </p:sldMasterIdLst>
+  <p:notesMasterIdLst>
+    <p:notesMasterId r:id="rId11"/>
+  </p:notesMasterIdLst>
   <p:sldIdLst>
     <p:sldId id="256" r:id="rId2"/>
     <p:sldId id="257" r:id="rId3"/>
@@ -15,10 +18,7 @@
     <p:sldId id="263" r:id="rId9"/>
     <p:sldId id="264" r:id="rId10"/>
   </p:sldIdLst>
-  <p:notesMasterIdLst>
-    <p:notesMasterId r:id="rId11"/>
-  </p:notesMasterIdLst>
-  <p:sldSz cx="9144000" cy="5143500"/>
+  <p:sldSz cx="9144000" cy="5143500" type="screen16x9"/>
   <p:notesSz cx="5143500" cy="9144000"/>
   <p:defaultTextStyle>
     <a:lvl1pPr marL="0" algn="l" defTabSz="914400" rtl="0" eaLnBrk="1" latinLnBrk="0" hangingPunct="1">
@@ -112,6 +112,11 @@
       </a:defRPr>
     </a:lvl9pPr>
   </p:defaultTextStyle>
+  <p:extLst>
+    <p:ext uri="{EFAFB233-063F-42B5-8137-9DF3F51BA10A}">
+      <p15:sldGuideLst xmlns:p15="http://schemas.microsoft.com/office/powerpoint/2012/main"/>
+    </p:ext>
+  </p:extLst>
 </p:presentation>
 </file>
 
@@ -137,234 +142,10 @@
           <a:chExt cx="0" cy="0"/>
         </a:xfrm>
       </p:grpSpPr>
-      <p:sp>
-        <p:nvSpPr>
-          <p:cNvPr id="2" name="Header Placeholder 1"/>
-          <p:cNvSpPr>
-            <a:spLocks noGrp="1"/>
-          </p:cNvSpPr>
-          <p:nvPr>
-            <p:ph type="hdr" sz="quarter"/>
-          </p:nvPr>
-        </p:nvSpPr>
-        <p:spPr>
-          <a:xfrm>
-            <a:off x="0" y="0"/>
-            <a:ext cx="2971800" cy="458788"/>
-          </a:xfrm>
-          <a:prstGeom prst="rect">
-            <a:avLst/>
-          </a:prstGeom>
-        </p:spPr>
-        <p:txBody>
-          <a:bodyPr vert="horz" lIns="91440" tIns="45720" rIns="91440" bIns="45720" rtlCol="0"/>
-          <a:lstStyle>
-            <a:lvl1pPr algn="l">
-              <a:defRPr sz="1200"/>
-            </a:lvl1pPr>
-          </a:lstStyle>
-          <a:p>
-            <a:endParaRPr lang="en-US"/>
-          </a:p>
-        </p:txBody>
-      </p:sp>
-      <p:sp>
-        <p:nvSpPr>
-          <p:cNvPr id="3" name="Date Placeholder 2"/>
-          <p:cNvSpPr>
-            <a:spLocks noGrp="1"/>
-          </p:cNvSpPr>
-          <p:nvPr>
-            <p:ph type="dt" idx="1"/>
-          </p:nvPr>
-        </p:nvSpPr>
-        <p:spPr>
-          <a:xfrm>
-            <a:off x="3884613" y="0"/>
-            <a:ext cx="2971800" cy="458788"/>
-          </a:xfrm>
-          <a:prstGeom prst="rect">
-            <a:avLst/>
-          </a:prstGeom>
-        </p:spPr>
-        <p:txBody>
-          <a:bodyPr vert="horz" lIns="91440" tIns="45720" rIns="91440" bIns="45720" rtlCol="0"/>
-          <a:lstStyle>
-            <a:lvl1pPr algn="r">
-              <a:defRPr sz="1200"/>
-            </a:lvl1pPr>
-          </a:lstStyle>
-          <a:p>
-            <a:fld id="{5282F153-3F37-0F45-9E97-73ACFA13230C}" type="datetimeFigureOut">
-              <a:rPr lang="en-US"/>
-              <a:t>7/23/19</a:t>
-            </a:fld>
-            <a:endParaRPr lang="en-US"/>
-          </a:p>
-        </p:txBody>
-      </p:sp>
-      <p:sp>
-        <p:nvSpPr>
-          <p:cNvPr id="4" name="Slide Image Placeholder 3"/>
-          <p:cNvSpPr>
-            <a:spLocks noGrp="1" noRot="1" noChangeAspect="1"/>
-          </p:cNvSpPr>
-          <p:nvPr>
-            <p:ph type="sldImg" idx="2"/>
-          </p:nvPr>
-        </p:nvSpPr>
-        <p:spPr>
-          <a:xfrm>
-            <a:off x="685800" y="1143000"/>
-            <a:ext cx="5486400" cy="3086100"/>
-          </a:xfrm>
-          <a:prstGeom prst="rect">
-            <a:avLst/>
-          </a:prstGeom>
-          <a:noFill/>
-          <a:ln w="12700">
-            <a:solidFill>
-              <a:prstClr val="black"/>
-            </a:solidFill>
-          </a:ln>
-        </p:spPr>
-        <p:txBody>
-          <a:bodyPr vert="horz" lIns="91440" tIns="45720" rIns="91440" bIns="45720" rtlCol="0" anchor="ctr"/>
-          <a:lstStyle/>
-          <a:p>
-            <a:endParaRPr lang="en-US"/>
-          </a:p>
-        </p:txBody>
-      </p:sp>
-      <p:sp>
-        <p:nvSpPr>
-          <p:cNvPr id="5" name="Notes Placeholder 4"/>
-          <p:cNvSpPr>
-            <a:spLocks noGrp="1"/>
-          </p:cNvSpPr>
-          <p:nvPr>
-            <p:ph type="body" sz="quarter" idx="3"/>
-          </p:nvPr>
-        </p:nvSpPr>
-        <p:spPr>
-          <a:xfrm>
-            <a:off x="685800" y="4400550"/>
-            <a:ext cx="5486400" cy="3600450"/>
-          </a:xfrm>
-          <a:prstGeom prst="rect">
-            <a:avLst/>
-          </a:prstGeom>
-        </p:spPr>
-        <p:txBody>
-          <a:bodyPr vert="horz" lIns="91440" tIns="45720" rIns="91440" bIns="45720" rtlCol="0"/>
-          <a:lstStyle/>
-          <a:p>
-            <a:pPr lvl="0"/>
-            <a:r>
-              <a:rPr lang="en-US"/>
-              <a:t>Click to edit Master text styles</a:t>
-            </a:r>
-          </a:p>
-          <a:p>
-            <a:pPr lvl="1"/>
-            <a:r>
-              <a:rPr lang="en-US"/>
-              <a:t>Second level</a:t>
-            </a:r>
-          </a:p>
-          <a:p>
-            <a:pPr lvl="2"/>
-            <a:r>
-              <a:rPr lang="en-US"/>
-              <a:t>Third level</a:t>
-            </a:r>
-          </a:p>
-          <a:p>
-            <a:pPr lvl="3"/>
-            <a:r>
-              <a:rPr lang="en-US"/>
-              <a:t>Fourth level</a:t>
-            </a:r>
-          </a:p>
-          <a:p>
-            <a:pPr lvl="4"/>
-            <a:r>
-              <a:rPr lang="en-US"/>
-              <a:t>Fifth level</a:t>
-            </a:r>
-          </a:p>
-        </p:txBody>
-      </p:sp>
-      <p:sp>
-        <p:nvSpPr>
-          <p:cNvPr id="6" name="Footer Placeholder 5"/>
-          <p:cNvSpPr>
-            <a:spLocks noGrp="1"/>
-          </p:cNvSpPr>
-          <p:nvPr>
-            <p:ph type="ftr" sz="quarter" idx="4"/>
-          </p:nvPr>
-        </p:nvSpPr>
-        <p:spPr>
-          <a:xfrm>
-            <a:off x="0" y="8685213"/>
-            <a:ext cx="2971800" cy="458787"/>
-          </a:xfrm>
-          <a:prstGeom prst="rect">
-            <a:avLst/>
-          </a:prstGeom>
-        </p:spPr>
-        <p:txBody>
-          <a:bodyPr vert="horz" lIns="91440" tIns="45720" rIns="91440" bIns="45720" rtlCol="0" anchor="b"/>
-          <a:lstStyle>
-            <a:lvl1pPr algn="l">
-              <a:defRPr sz="1200"/>
-            </a:lvl1pPr>
-          </a:lstStyle>
-          <a:p>
-            <a:endParaRPr lang="en-US"/>
-          </a:p>
-        </p:txBody>
-      </p:sp>
-      <p:sp>
-        <p:nvSpPr>
-          <p:cNvPr id="7" name="Slide Number Placeholder 6"/>
-          <p:cNvSpPr>
-            <a:spLocks noGrp="1"/>
-          </p:cNvSpPr>
-          <p:nvPr>
-            <p:ph type="sldNum" sz="quarter" idx="5"/>
-          </p:nvPr>
-        </p:nvSpPr>
-        <p:spPr>
-          <a:xfrm>
-            <a:off x="3884613" y="8685213"/>
-            <a:ext cx="2971800" cy="458787"/>
-          </a:xfrm>
-          <a:prstGeom prst="rect">
-            <a:avLst/>
-          </a:prstGeom>
-        </p:spPr>
-        <p:txBody>
-          <a:bodyPr vert="horz" lIns="91440" tIns="45720" rIns="91440" bIns="45720" rtlCol="0" anchor="b"/>
-          <a:lstStyle>
-            <a:lvl1pPr algn="r">
-              <a:defRPr sz="1200"/>
-            </a:lvl1pPr>
-          </a:lstStyle>
-          <a:p>
-            <a:fld id="{CE5E9CC1-C706-0F49-92D6-E571CC5EEA8F}" type="slidenum">
-              <a:rPr lang="en-US"/>
-              <a:t>‹#›</a:t>
-            </a:fld>
-            <a:endParaRPr lang="en-US"/>
-          </a:p>
-        </p:txBody>
-      </p:sp>
     </p:spTree>
     <p:extLst>
       <p:ext uri="{BB962C8B-B14F-4D97-AF65-F5344CB8AC3E}">
-        <p14:creationId xmlns:p14="http://schemas.microsoft.com/office/powerpoint/2010/main" val="1024086991"/>
+        <p14:creationId xmlns:p14="http://schemas.microsoft.com/office/powerpoint/2010/main" val="4195456721"/>
       </p:ext>
     </p:extLst>
   </p:cSld>
@@ -508,10 +289,6 @@
           <a:bodyPr/>
           <a:lstStyle/>
           <a:p>
-            <a:r>
-              <a:rPr lang="en-US" dirty="0"/>
-              <a:t/>
-            </a:r>
             <a:endParaRPr lang="en-US" dirty="0"/>
           </a:p>
         </p:txBody>
@@ -596,10 +373,6 @@
           <a:bodyPr/>
           <a:lstStyle/>
           <a:p>
-            <a:r>
-              <a:rPr lang="en-US" dirty="0"/>
-              <a:t/>
-            </a:r>
             <a:endParaRPr lang="en-US" dirty="0"/>
           </a:p>
         </p:txBody>
@@ -684,10 +457,6 @@
           <a:bodyPr/>
           <a:lstStyle/>
           <a:p>
-            <a:r>
-              <a:rPr lang="en-US" dirty="0"/>
-              <a:t/>
-            </a:r>
             <a:endParaRPr lang="en-US" dirty="0"/>
           </a:p>
         </p:txBody>
@@ -772,10 +541,6 @@
           <a:bodyPr/>
           <a:lstStyle/>
           <a:p>
-            <a:r>
-              <a:rPr lang="en-US" dirty="0"/>
-              <a:t/>
-            </a:r>
             <a:endParaRPr lang="en-US" dirty="0"/>
           </a:p>
         </p:txBody>
@@ -860,10 +625,6 @@
           <a:bodyPr/>
           <a:lstStyle/>
           <a:p>
-            <a:r>
-              <a:rPr lang="en-US" dirty="0"/>
-              <a:t/>
-            </a:r>
             <a:endParaRPr lang="en-US" dirty="0"/>
           </a:p>
         </p:txBody>
@@ -948,10 +709,6 @@
           <a:bodyPr/>
           <a:lstStyle/>
           <a:p>
-            <a:r>
-              <a:rPr lang="en-US" dirty="0"/>
-              <a:t/>
-            </a:r>
             <a:endParaRPr lang="en-US" dirty="0"/>
           </a:p>
         </p:txBody>
@@ -1036,10 +793,6 @@
           <a:bodyPr/>
           <a:lstStyle/>
           <a:p>
-            <a:r>
-              <a:rPr lang="en-US" dirty="0"/>
-              <a:t/>
-            </a:r>
             <a:endParaRPr lang="en-US" dirty="0"/>
           </a:p>
         </p:txBody>
@@ -1124,10 +877,6 @@
           <a:bodyPr/>
           <a:lstStyle/>
           <a:p>
-            <a:r>
-              <a:rPr lang="en-US" dirty="0"/>
-              <a:t/>
-            </a:r>
             <a:endParaRPr lang="en-US" dirty="0"/>
           </a:p>
         </p:txBody>
@@ -1212,10 +961,6 @@
           <a:bodyPr/>
           <a:lstStyle/>
           <a:p>
-            <a:r>
-              <a:rPr lang="en-US" dirty="0"/>
-              <a:t/>
-            </a:r>
             <a:endParaRPr lang="en-US" dirty="0"/>
           </a:p>
         </p:txBody>
@@ -1289,6 +1034,11 @@
 <file path=ppt/slideMasters/slideMaster1.xml><?xml version="1.0" encoding="utf-8"?>
 <p:sldMaster xmlns:a="http://schemas.openxmlformats.org/drawingml/2006/main" xmlns:r="http://schemas.openxmlformats.org/officeDocument/2006/relationships" xmlns:p="http://schemas.openxmlformats.org/presentationml/2006/main">
   <p:cSld>
+    <p:bg>
+      <p:bgRef idx="1001">
+        <a:schemeClr val="bg1"/>
+      </p:bgRef>
+    </p:bg>
     <p:spTree>
       <p:nvGrpSpPr>
         <p:cNvPr id="1" name=""/>
@@ -1571,6 +1321,7 @@
         <a:solidFill>
           <a:srgbClr val="0D1117"/>
         </a:solidFill>
+        <a:effectLst/>
       </p:bgPr>
     </p:bg>
     <p:spTree>
@@ -1606,6 +1357,13 @@
           </a:solidFill>
           <a:ln/>
         </p:spPr>
+        <p:txBody>
+          <a:bodyPr/>
+          <a:lstStyle/>
+          <a:p>
+            <a:endParaRPr lang="en-US"/>
+          </a:p>
+        </p:txBody>
       </p:sp>
       <p:sp>
         <p:nvSpPr>
@@ -1633,6 +1391,13 @@
             <a:prstDash val="solid"/>
           </a:ln>
         </p:spPr>
+        <p:txBody>
+          <a:bodyPr/>
+          <a:lstStyle/>
+          <a:p>
+            <a:endParaRPr lang="en-US"/>
+          </a:p>
+        </p:txBody>
       </p:sp>
       <p:sp>
         <p:nvSpPr>
@@ -1655,7 +1420,7 @@
           <a:bodyPr wrap="square" lIns="0" tIns="0" rIns="0" bIns="0" rtlCol="0" anchor="ctr"/>
           <a:lstStyle/>
           <a:p>
-            <a:pPr algn="ctr" indent="0" marL="0">
+            <a:pPr marL="0" indent="0" algn="ctr">
               <a:buNone/>
             </a:pPr>
             <a:r>
@@ -1691,7 +1456,7 @@
           <a:bodyPr wrap="square" rtlCol="0" anchor="ctr"/>
           <a:lstStyle/>
           <a:p>
-            <a:pPr indent="0" marL="0">
+            <a:pPr marL="0" indent="0">
               <a:buNone/>
             </a:pPr>
             <a:r>
@@ -1730,7 +1495,7 @@
           <a:bodyPr wrap="square" rtlCol="0" anchor="ctr"/>
           <a:lstStyle/>
           <a:p>
-            <a:pPr indent="0" marL="0">
+            <a:pPr marL="0" indent="0">
               <a:buNone/>
             </a:pPr>
             <a:r>
@@ -1769,7 +1534,7 @@
           <a:bodyPr wrap="square" rtlCol="0" anchor="ctr"/>
           <a:lstStyle/>
           <a:p>
-            <a:pPr indent="0" marL="0">
+            <a:pPr marL="0" indent="0">
               <a:buNone/>
             </a:pPr>
             <a:r>
@@ -1809,6 +1574,13 @@
             <a:prstDash val="solid"/>
           </a:ln>
         </p:spPr>
+        <p:txBody>
+          <a:bodyPr/>
+          <a:lstStyle/>
+          <a:p>
+            <a:endParaRPr lang="en-US"/>
+          </a:p>
+        </p:txBody>
       </p:sp>
       <p:sp>
         <p:nvSpPr>
@@ -1836,6 +1608,13 @@
             <a:prstDash val="solid"/>
           </a:ln>
         </p:spPr>
+        <p:txBody>
+          <a:bodyPr/>
+          <a:lstStyle/>
+          <a:p>
+            <a:endParaRPr lang="en-US"/>
+          </a:p>
+        </p:txBody>
       </p:sp>
       <p:sp>
         <p:nvSpPr>
@@ -1858,7 +1637,7 @@
           <a:bodyPr wrap="square" lIns="0" tIns="0" rIns="0" bIns="0" rtlCol="0" anchor="ctr"/>
           <a:lstStyle/>
           <a:p>
-            <a:pPr algn="ctr" indent="0" marL="0">
+            <a:pPr marL="0" indent="0" algn="ctr">
               <a:buNone/>
             </a:pPr>
             <a:r>
@@ -1899,6 +1678,13 @@
             <a:prstDash val="solid"/>
           </a:ln>
         </p:spPr>
+        <p:txBody>
+          <a:bodyPr/>
+          <a:lstStyle/>
+          <a:p>
+            <a:endParaRPr lang="en-US"/>
+          </a:p>
+        </p:txBody>
       </p:sp>
       <p:sp>
         <p:nvSpPr>
@@ -1921,7 +1707,7 @@
           <a:bodyPr wrap="square" lIns="0" tIns="0" rIns="0" bIns="0" rtlCol="0" anchor="ctr"/>
           <a:lstStyle/>
           <a:p>
-            <a:pPr algn="ctr" indent="0" marL="0">
+            <a:pPr marL="0" indent="0" algn="ctr">
               <a:buNone/>
             </a:pPr>
             <a:r>
@@ -1962,6 +1748,13 @@
             <a:prstDash val="solid"/>
           </a:ln>
         </p:spPr>
+        <p:txBody>
+          <a:bodyPr/>
+          <a:lstStyle/>
+          <a:p>
+            <a:endParaRPr lang="en-US"/>
+          </a:p>
+        </p:txBody>
       </p:sp>
       <p:sp>
         <p:nvSpPr>
@@ -1984,7 +1777,7 @@
           <a:bodyPr wrap="square" lIns="0" tIns="0" rIns="0" bIns="0" rtlCol="0" anchor="ctr"/>
           <a:lstStyle/>
           <a:p>
-            <a:pPr algn="ctr" indent="0" marL="0">
+            <a:pPr marL="0" indent="0" algn="ctr">
               <a:buNone/>
             </a:pPr>
             <a:r>
@@ -2020,7 +1813,7 @@
           <a:bodyPr wrap="square" rtlCol="0" anchor="ctr"/>
           <a:lstStyle/>
           <a:p>
-            <a:pPr indent="0" marL="0">
+            <a:pPr marL="0" indent="0">
               <a:buNone/>
             </a:pPr>
             <a:r>
@@ -2054,6 +1847,7 @@
         <a:solidFill>
           <a:srgbClr val="F6F8FA"/>
         </a:solidFill>
+        <a:effectLst/>
       </p:bgPr>
     </p:bg>
     <p:spTree>
@@ -2089,6 +1883,13 @@
           </a:solidFill>
           <a:ln/>
         </p:spPr>
+        <p:txBody>
+          <a:bodyPr/>
+          <a:lstStyle/>
+          <a:p>
+            <a:endParaRPr lang="en-US"/>
+          </a:p>
+        </p:txBody>
       </p:sp>
       <p:sp>
         <p:nvSpPr>
@@ -2111,11 +1912,11 @@
           <a:bodyPr wrap="square" lIns="0" tIns="0" rIns="0" bIns="0" rtlCol="0" anchor="ctr"/>
           <a:lstStyle/>
           <a:p>
-            <a:pPr indent="0" marL="0">
-              <a:buNone/>
-            </a:pPr>
-            <a:r>
-              <a:rPr lang="en-US" sz="1300" b="1" spc="300" kern="0" dirty="0">
+            <a:pPr marL="0" indent="0">
+              <a:buNone/>
+            </a:pPr>
+            <a:r>
+              <a:rPr lang="en-US" sz="1300" b="1" kern="0" spc="300" dirty="0">
                 <a:solidFill>
                   <a:srgbClr val="FFFFFF"/>
                 </a:solidFill>
@@ -2147,7 +1948,7 @@
           <a:bodyPr wrap="square" lIns="0" tIns="0" rIns="0" bIns="0" rtlCol="0" anchor="ctr"/>
           <a:lstStyle/>
           <a:p>
-            <a:pPr algn="r" indent="0" marL="0">
+            <a:pPr marL="0" indent="0" algn="r">
               <a:buNone/>
             </a:pPr>
             <a:r>
@@ -2186,13 +1987,20 @@
             <a:prstDash val="solid"/>
           </a:ln>
           <a:effectLst>
-            <a:outerShdw sx="100000" sy="100000" kx="0" ky="0" algn="bl" rotWithShape="0" blurRad="101600" dist="38100" dir="8100000">
+            <a:outerShdw blurRad="101600" dist="38100" dir="8100000" algn="bl" rotWithShape="0">
               <a:srgbClr val="000000">
                 <a:alpha val="18000"/>
               </a:srgbClr>
             </a:outerShdw>
           </a:effectLst>
         </p:spPr>
+        <p:txBody>
+          <a:bodyPr/>
+          <a:lstStyle/>
+          <a:p>
+            <a:endParaRPr lang="en-US"/>
+          </a:p>
+        </p:txBody>
       </p:sp>
       <p:sp>
         <p:nvSpPr>
@@ -2213,6 +2021,13 @@
           </a:solidFill>
           <a:ln/>
         </p:spPr>
+        <p:txBody>
+          <a:bodyPr/>
+          <a:lstStyle/>
+          <a:p>
+            <a:endParaRPr lang="en-US"/>
+          </a:p>
+        </p:txBody>
       </p:sp>
       <p:sp>
         <p:nvSpPr>
@@ -2235,7 +2050,7 @@
           <a:bodyPr wrap="square" rtlCol="0" anchor="ctr"/>
           <a:lstStyle/>
           <a:p>
-            <a:pPr algn="ctr" indent="0" marL="0">
+            <a:pPr marL="0" indent="0" algn="ctr">
               <a:buNone/>
             </a:pPr>
             <a:r>
@@ -2271,7 +2086,7 @@
           <a:bodyPr wrap="square" rtlCol="0" anchor="ctr"/>
           <a:lstStyle/>
           <a:p>
-            <a:pPr algn="ctr" indent="0" marL="0">
+            <a:pPr marL="0" indent="0" algn="ctr">
               <a:buNone/>
             </a:pPr>
             <a:r>
@@ -2310,7 +2125,7 @@
           <a:bodyPr wrap="square" rtlCol="0" anchor="ctr"/>
           <a:lstStyle/>
           <a:p>
-            <a:pPr algn="ctr" indent="0" marL="0">
+            <a:pPr marL="0" indent="0" algn="ctr">
               <a:buNone/>
             </a:pPr>
             <a:r>
@@ -2352,13 +2167,20 @@
             <a:prstDash val="solid"/>
           </a:ln>
           <a:effectLst>
-            <a:outerShdw sx="100000" sy="100000" kx="0" ky="0" algn="bl" rotWithShape="0" blurRad="101600" dist="38100" dir="8100000">
+            <a:outerShdw blurRad="101600" dist="38100" dir="8100000" algn="bl" rotWithShape="0">
               <a:srgbClr val="000000">
                 <a:alpha val="18000"/>
               </a:srgbClr>
             </a:outerShdw>
           </a:effectLst>
         </p:spPr>
+        <p:txBody>
+          <a:bodyPr/>
+          <a:lstStyle/>
+          <a:p>
+            <a:endParaRPr lang="en-US"/>
+          </a:p>
+        </p:txBody>
       </p:sp>
       <p:sp>
         <p:nvSpPr>
@@ -2379,6 +2201,13 @@
           </a:solidFill>
           <a:ln/>
         </p:spPr>
+        <p:txBody>
+          <a:bodyPr/>
+          <a:lstStyle/>
+          <a:p>
+            <a:endParaRPr lang="en-US"/>
+          </a:p>
+        </p:txBody>
       </p:sp>
       <p:sp>
         <p:nvSpPr>
@@ -2401,7 +2230,7 @@
           <a:bodyPr wrap="square" rtlCol="0" anchor="ctr"/>
           <a:lstStyle/>
           <a:p>
-            <a:pPr algn="ctr" indent="0" marL="0">
+            <a:pPr marL="0" indent="0" algn="ctr">
               <a:buNone/>
             </a:pPr>
             <a:r>
@@ -2437,7 +2266,7 @@
           <a:bodyPr wrap="square" rtlCol="0" anchor="ctr"/>
           <a:lstStyle/>
           <a:p>
-            <a:pPr algn="ctr" indent="0" marL="0">
+            <a:pPr marL="0" indent="0" algn="ctr">
               <a:buNone/>
             </a:pPr>
             <a:r>
@@ -2476,7 +2305,7 @@
           <a:bodyPr wrap="square" rtlCol="0" anchor="ctr"/>
           <a:lstStyle/>
           <a:p>
-            <a:pPr algn="ctr" indent="0" marL="0">
+            <a:pPr marL="0" indent="0" algn="ctr">
               <a:buNone/>
             </a:pPr>
             <a:r>
@@ -2518,13 +2347,20 @@
             <a:prstDash val="solid"/>
           </a:ln>
           <a:effectLst>
-            <a:outerShdw sx="100000" sy="100000" kx="0" ky="0" algn="bl" rotWithShape="0" blurRad="101600" dist="38100" dir="8100000">
+            <a:outerShdw blurRad="101600" dist="38100" dir="8100000" algn="bl" rotWithShape="0">
               <a:srgbClr val="000000">
                 <a:alpha val="18000"/>
               </a:srgbClr>
             </a:outerShdw>
           </a:effectLst>
         </p:spPr>
+        <p:txBody>
+          <a:bodyPr/>
+          <a:lstStyle/>
+          <a:p>
+            <a:endParaRPr lang="en-US"/>
+          </a:p>
+        </p:txBody>
       </p:sp>
       <p:sp>
         <p:nvSpPr>
@@ -2545,6 +2381,13 @@
           </a:solidFill>
           <a:ln/>
         </p:spPr>
+        <p:txBody>
+          <a:bodyPr/>
+          <a:lstStyle/>
+          <a:p>
+            <a:endParaRPr lang="en-US"/>
+          </a:p>
+        </p:txBody>
       </p:sp>
       <p:sp>
         <p:nvSpPr>
@@ -2567,7 +2410,7 @@
           <a:bodyPr wrap="square" rtlCol="0" anchor="ctr"/>
           <a:lstStyle/>
           <a:p>
-            <a:pPr algn="ctr" indent="0" marL="0">
+            <a:pPr marL="0" indent="0" algn="ctr">
               <a:buNone/>
             </a:pPr>
             <a:r>
@@ -2603,7 +2446,7 @@
           <a:bodyPr wrap="square" rtlCol="0" anchor="ctr"/>
           <a:lstStyle/>
           <a:p>
-            <a:pPr algn="ctr" indent="0" marL="0">
+            <a:pPr marL="0" indent="0" algn="ctr">
               <a:buNone/>
             </a:pPr>
             <a:r>
@@ -2642,7 +2485,7 @@
           <a:bodyPr wrap="square" rtlCol="0" anchor="ctr"/>
           <a:lstStyle/>
           <a:p>
-            <a:pPr algn="ctr" indent="0" marL="0">
+            <a:pPr marL="0" indent="0" algn="ctr">
               <a:buNone/>
             </a:pPr>
             <a:r>
@@ -2684,13 +2527,20 @@
             <a:prstDash val="solid"/>
           </a:ln>
           <a:effectLst>
-            <a:outerShdw sx="100000" sy="100000" kx="0" ky="0" algn="bl" rotWithShape="0" blurRad="101600" dist="38100" dir="8100000">
+            <a:outerShdw blurRad="101600" dist="38100" dir="8100000" algn="bl" rotWithShape="0">
               <a:srgbClr val="000000">
                 <a:alpha val="18000"/>
               </a:srgbClr>
             </a:outerShdw>
           </a:effectLst>
         </p:spPr>
+        <p:txBody>
+          <a:bodyPr/>
+          <a:lstStyle/>
+          <a:p>
+            <a:endParaRPr lang="en-US"/>
+          </a:p>
+        </p:txBody>
       </p:sp>
       <p:sp>
         <p:nvSpPr>
@@ -2711,6 +2561,13 @@
           </a:solidFill>
           <a:ln/>
         </p:spPr>
+        <p:txBody>
+          <a:bodyPr/>
+          <a:lstStyle/>
+          <a:p>
+            <a:endParaRPr lang="en-US"/>
+          </a:p>
+        </p:txBody>
       </p:sp>
       <p:sp>
         <p:nvSpPr>
@@ -2733,7 +2590,7 @@
           <a:bodyPr wrap="square" rtlCol="0" anchor="ctr"/>
           <a:lstStyle/>
           <a:p>
-            <a:pPr algn="ctr" indent="0" marL="0">
+            <a:pPr marL="0" indent="0" algn="ctr">
               <a:buNone/>
             </a:pPr>
             <a:r>
@@ -2769,7 +2626,7 @@
           <a:bodyPr wrap="square" rtlCol="0" anchor="ctr"/>
           <a:lstStyle/>
           <a:p>
-            <a:pPr algn="ctr" indent="0" marL="0">
+            <a:pPr marL="0" indent="0" algn="ctr">
               <a:buNone/>
             </a:pPr>
             <a:r>
@@ -2808,7 +2665,7 @@
           <a:bodyPr wrap="square" rtlCol="0" anchor="ctr"/>
           <a:lstStyle/>
           <a:p>
-            <a:pPr algn="ctr" indent="0" marL="0">
+            <a:pPr marL="0" indent="0" algn="ctr">
               <a:buNone/>
             </a:pPr>
             <a:r>
@@ -2850,13 +2707,20 @@
             <a:prstDash val="solid"/>
           </a:ln>
           <a:effectLst>
-            <a:outerShdw sx="100000" sy="100000" kx="0" ky="0" algn="bl" rotWithShape="0" blurRad="101600" dist="38100" dir="8100000">
+            <a:outerShdw blurRad="101600" dist="38100" dir="8100000" algn="bl" rotWithShape="0">
               <a:srgbClr val="000000">
                 <a:alpha val="18000"/>
               </a:srgbClr>
             </a:outerShdw>
           </a:effectLst>
         </p:spPr>
+        <p:txBody>
+          <a:bodyPr/>
+          <a:lstStyle/>
+          <a:p>
+            <a:endParaRPr lang="en-US"/>
+          </a:p>
+        </p:txBody>
       </p:sp>
       <p:sp>
         <p:nvSpPr>
@@ -2877,6 +2741,13 @@
           </a:solidFill>
           <a:ln/>
         </p:spPr>
+        <p:txBody>
+          <a:bodyPr/>
+          <a:lstStyle/>
+          <a:p>
+            <a:endParaRPr lang="en-US"/>
+          </a:p>
+        </p:txBody>
       </p:sp>
       <p:sp>
         <p:nvSpPr>
@@ -2899,7 +2770,7 @@
           <a:bodyPr wrap="square" rtlCol="0" anchor="ctr"/>
           <a:lstStyle/>
           <a:p>
-            <a:pPr algn="ctr" indent="0" marL="0">
+            <a:pPr marL="0" indent="0" algn="ctr">
               <a:buNone/>
             </a:pPr>
             <a:r>
@@ -2935,7 +2806,7 @@
           <a:bodyPr wrap="square" rtlCol="0" anchor="ctr"/>
           <a:lstStyle/>
           <a:p>
-            <a:pPr algn="ctr" indent="0" marL="0">
+            <a:pPr marL="0" indent="0" algn="ctr">
               <a:buNone/>
             </a:pPr>
             <a:r>
@@ -2974,7 +2845,7 @@
           <a:bodyPr wrap="square" rtlCol="0" anchor="ctr"/>
           <a:lstStyle/>
           <a:p>
-            <a:pPr algn="ctr" indent="0" marL="0">
+            <a:pPr marL="0" indent="0" algn="ctr">
               <a:buNone/>
             </a:pPr>
             <a:r>
@@ -3016,13 +2887,20 @@
             <a:prstDash val="solid"/>
           </a:ln>
           <a:effectLst>
-            <a:outerShdw sx="100000" sy="100000" kx="0" ky="0" algn="bl" rotWithShape="0" blurRad="101600" dist="38100" dir="8100000">
+            <a:outerShdw blurRad="101600" dist="38100" dir="8100000" algn="bl" rotWithShape="0">
               <a:srgbClr val="000000">
                 <a:alpha val="18000"/>
               </a:srgbClr>
             </a:outerShdw>
           </a:effectLst>
         </p:spPr>
+        <p:txBody>
+          <a:bodyPr/>
+          <a:lstStyle/>
+          <a:p>
+            <a:endParaRPr lang="en-US"/>
+          </a:p>
+        </p:txBody>
       </p:sp>
       <p:sp>
         <p:nvSpPr>
@@ -3043,6 +2921,13 @@
           </a:solidFill>
           <a:ln/>
         </p:spPr>
+        <p:txBody>
+          <a:bodyPr/>
+          <a:lstStyle/>
+          <a:p>
+            <a:endParaRPr lang="en-US"/>
+          </a:p>
+        </p:txBody>
       </p:sp>
       <p:sp>
         <p:nvSpPr>
@@ -3065,7 +2950,7 @@
           <a:bodyPr wrap="square" rtlCol="0" anchor="ctr"/>
           <a:lstStyle/>
           <a:p>
-            <a:pPr algn="ctr" indent="0" marL="0">
+            <a:pPr marL="0" indent="0" algn="ctr">
               <a:buNone/>
             </a:pPr>
             <a:r>
@@ -3101,7 +2986,7 @@
           <a:bodyPr wrap="square" rtlCol="0" anchor="ctr"/>
           <a:lstStyle/>
           <a:p>
-            <a:pPr algn="ctr" indent="0" marL="0">
+            <a:pPr marL="0" indent="0" algn="ctr">
               <a:buNone/>
             </a:pPr>
             <a:r>
@@ -3140,7 +3025,7 @@
           <a:bodyPr wrap="square" rtlCol="0" anchor="ctr"/>
           <a:lstStyle/>
           <a:p>
-            <a:pPr algn="ctr" indent="0" marL="0">
+            <a:pPr marL="0" indent="0" algn="ctr">
               <a:buNone/>
             </a:pPr>
             <a:r>
@@ -3182,13 +3067,20 @@
             <a:prstDash val="solid"/>
           </a:ln>
           <a:effectLst>
-            <a:outerShdw sx="100000" sy="100000" kx="0" ky="0" algn="bl" rotWithShape="0" blurRad="101600" dist="38100" dir="8100000">
+            <a:outerShdw blurRad="101600" dist="38100" dir="8100000" algn="bl" rotWithShape="0">
               <a:srgbClr val="000000">
                 <a:alpha val="18000"/>
               </a:srgbClr>
             </a:outerShdw>
           </a:effectLst>
         </p:spPr>
+        <p:txBody>
+          <a:bodyPr/>
+          <a:lstStyle/>
+          <a:p>
+            <a:endParaRPr lang="en-US"/>
+          </a:p>
+        </p:txBody>
       </p:sp>
       <p:sp>
         <p:nvSpPr>
@@ -3209,6 +3101,13 @@
           </a:solidFill>
           <a:ln/>
         </p:spPr>
+        <p:txBody>
+          <a:bodyPr/>
+          <a:lstStyle/>
+          <a:p>
+            <a:endParaRPr lang="en-US"/>
+          </a:p>
+        </p:txBody>
       </p:sp>
       <p:sp>
         <p:nvSpPr>
@@ -3231,7 +3130,7 @@
           <a:bodyPr wrap="square" rtlCol="0" anchor="ctr"/>
           <a:lstStyle/>
           <a:p>
-            <a:pPr algn="ctr" indent="0" marL="0">
+            <a:pPr marL="0" indent="0" algn="ctr">
               <a:buNone/>
             </a:pPr>
             <a:r>
@@ -3267,7 +3166,7 @@
           <a:bodyPr wrap="square" rtlCol="0" anchor="ctr"/>
           <a:lstStyle/>
           <a:p>
-            <a:pPr algn="ctr" indent="0" marL="0">
+            <a:pPr marL="0" indent="0" algn="ctr">
               <a:buNone/>
             </a:pPr>
             <a:r>
@@ -3306,7 +3205,7 @@
           <a:bodyPr wrap="square" rtlCol="0" anchor="ctr"/>
           <a:lstStyle/>
           <a:p>
-            <a:pPr algn="ctr" indent="0" marL="0">
+            <a:pPr marL="0" indent="0" algn="ctr">
               <a:buNone/>
             </a:pPr>
             <a:r>
@@ -3345,7 +3244,7 @@
           <a:bodyPr wrap="square" rtlCol="0" anchor="ctr"/>
           <a:lstStyle/>
           <a:p>
-            <a:pPr algn="ctr" indent="0" marL="0">
+            <a:pPr marL="0" indent="0" algn="ctr">
               <a:buNone/>
             </a:pPr>
             <a:r>
@@ -3376,6 +3275,7 @@
         <a:solidFill>
           <a:srgbClr val="0D1117"/>
         </a:solidFill>
+        <a:effectLst/>
       </p:bgPr>
     </p:bg>
     <p:spTree>
@@ -3411,6 +3311,13 @@
           </a:solidFill>
           <a:ln/>
         </p:spPr>
+        <p:txBody>
+          <a:bodyPr/>
+          <a:lstStyle/>
+          <a:p>
+            <a:endParaRPr lang="en-US"/>
+          </a:p>
+        </p:txBody>
       </p:sp>
       <p:sp>
         <p:nvSpPr>
@@ -3433,11 +3340,11 @@
           <a:bodyPr wrap="square" lIns="0" tIns="0" rIns="0" bIns="0" rtlCol="0" anchor="ctr"/>
           <a:lstStyle/>
           <a:p>
-            <a:pPr indent="0" marL="0">
-              <a:buNone/>
-            </a:pPr>
-            <a:r>
-              <a:rPr lang="en-US" sz="1300" b="1" spc="300" kern="0" dirty="0">
+            <a:pPr marL="0" indent="0">
+              <a:buNone/>
+            </a:pPr>
+            <a:r>
+              <a:rPr lang="en-US" sz="1300" b="1" kern="0" spc="300" dirty="0">
                 <a:solidFill>
                   <a:srgbClr val="FFFFFF"/>
                 </a:solidFill>
@@ -3469,7 +3376,7 @@
           <a:bodyPr wrap="square" lIns="0" tIns="0" rIns="0" bIns="0" rtlCol="0" anchor="ctr"/>
           <a:lstStyle/>
           <a:p>
-            <a:pPr algn="r" indent="0" marL="0">
+            <a:pPr marL="0" indent="0" algn="r">
               <a:buNone/>
             </a:pPr>
             <a:r>
@@ -3510,6 +3417,13 @@
             <a:prstDash val="sysDot"/>
           </a:ln>
         </p:spPr>
+        <p:txBody>
+          <a:bodyPr/>
+          <a:lstStyle/>
+          <a:p>
+            <a:endParaRPr lang="en-US"/>
+          </a:p>
+        </p:txBody>
       </p:sp>
       <p:sp>
         <p:nvSpPr>
@@ -3532,11 +3446,11 @@
           <a:bodyPr wrap="square" rtlCol="0" anchor="ctr"/>
           <a:lstStyle/>
           <a:p>
-            <a:pPr algn="ctr" indent="0" marL="0">
-              <a:buNone/>
-            </a:pPr>
-            <a:r>
-              <a:rPr lang="en-US" sz="800" b="1" spc="100" kern="0" dirty="0">
+            <a:pPr marL="0" indent="0" algn="ctr">
+              <a:buNone/>
+            </a:pPr>
+            <a:r>
+              <a:rPr lang="en-US" sz="800" b="1" kern="0" spc="100" dirty="0">
                 <a:solidFill>
                   <a:srgbClr val="1A73E8"/>
                 </a:solidFill>
@@ -3573,6 +3487,13 @@
             <a:prstDash val="sysDot"/>
           </a:ln>
         </p:spPr>
+        <p:txBody>
+          <a:bodyPr/>
+          <a:lstStyle/>
+          <a:p>
+            <a:endParaRPr lang="en-US"/>
+          </a:p>
+        </p:txBody>
       </p:sp>
       <p:sp>
         <p:nvSpPr>
@@ -3595,11 +3516,11 @@
           <a:bodyPr wrap="square" rtlCol="0" anchor="ctr"/>
           <a:lstStyle/>
           <a:p>
-            <a:pPr algn="ctr" indent="0" marL="0">
-              <a:buNone/>
-            </a:pPr>
-            <a:r>
-              <a:rPr lang="en-US" sz="800" b="1" spc="100" kern="0" dirty="0">
+            <a:pPr marL="0" indent="0" algn="ctr">
+              <a:buNone/>
+            </a:pPr>
+            <a:r>
+              <a:rPr lang="en-US" sz="800" b="1" kern="0" spc="100" dirty="0">
                 <a:solidFill>
                   <a:srgbClr val="F4B400"/>
                 </a:solidFill>
@@ -3636,6 +3557,13 @@
             <a:prstDash val="sysDot"/>
           </a:ln>
         </p:spPr>
+        <p:txBody>
+          <a:bodyPr/>
+          <a:lstStyle/>
+          <a:p>
+            <a:endParaRPr lang="en-US"/>
+          </a:p>
+        </p:txBody>
       </p:sp>
       <p:sp>
         <p:nvSpPr>
@@ -3658,11 +3586,11 @@
           <a:bodyPr wrap="square" rtlCol="0" anchor="ctr"/>
           <a:lstStyle/>
           <a:p>
-            <a:pPr algn="ctr" indent="0" marL="0">
-              <a:buNone/>
-            </a:pPr>
-            <a:r>
-              <a:rPr lang="en-US" sz="800" b="1" spc="100" kern="0" dirty="0">
+            <a:pPr marL="0" indent="0" algn="ctr">
+              <a:buNone/>
+            </a:pPr>
+            <a:r>
+              <a:rPr lang="en-US" sz="800" b="1" kern="0" spc="100" dirty="0">
                 <a:solidFill>
                   <a:srgbClr val="0F9D58"/>
                 </a:solidFill>
@@ -3697,13 +3625,20 @@
             <a:prstDash val="solid"/>
           </a:ln>
           <a:effectLst>
-            <a:outerShdw sx="100000" sy="100000" kx="0" ky="0" algn="bl" rotWithShape="0" blurRad="76200" dist="25400" dir="8100000">
+            <a:outerShdw blurRad="76200" dist="25400" dir="8100000" algn="bl" rotWithShape="0">
               <a:srgbClr val="000000">
                 <a:alpha val="40000"/>
               </a:srgbClr>
             </a:outerShdw>
           </a:effectLst>
         </p:spPr>
+        <p:txBody>
+          <a:bodyPr/>
+          <a:lstStyle/>
+          <a:p>
+            <a:endParaRPr lang="en-US"/>
+          </a:p>
+        </p:txBody>
       </p:sp>
       <p:sp>
         <p:nvSpPr>
@@ -3724,6 +3659,13 @@
           </a:solidFill>
           <a:ln/>
         </p:spPr>
+        <p:txBody>
+          <a:bodyPr/>
+          <a:lstStyle/>
+          <a:p>
+            <a:endParaRPr lang="en-US"/>
+          </a:p>
+        </p:txBody>
       </p:sp>
       <p:sp>
         <p:nvSpPr>
@@ -3746,6 +3688,13 @@
           </a:solidFill>
           <a:ln/>
         </p:spPr>
+        <p:txBody>
+          <a:bodyPr/>
+          <a:lstStyle/>
+          <a:p>
+            <a:endParaRPr lang="en-US"/>
+          </a:p>
+        </p:txBody>
       </p:sp>
       <p:sp>
         <p:nvSpPr>
@@ -3768,7 +3717,7 @@
           <a:bodyPr wrap="square" lIns="0" tIns="0" rIns="0" bIns="0" rtlCol="0" anchor="ctr"/>
           <a:lstStyle/>
           <a:p>
-            <a:pPr algn="ctr" indent="0" marL="0">
+            <a:pPr marL="0" indent="0" algn="ctr">
               <a:buNone/>
             </a:pPr>
             <a:r>
@@ -3804,7 +3753,7 @@
           <a:bodyPr wrap="square" lIns="0" tIns="0" rIns="0" bIns="0" rtlCol="0" anchor="ctr"/>
           <a:lstStyle/>
           <a:p>
-            <a:pPr indent="0" marL="0">
+            <a:pPr marL="0" indent="0">
               <a:buNone/>
             </a:pPr>
             <a:r>
@@ -3843,7 +3792,7 @@
           <a:bodyPr wrap="square" lIns="0" tIns="0" rIns="0" bIns="0" rtlCol="0" anchor="ctr"/>
           <a:lstStyle/>
           <a:p>
-            <a:pPr indent="0" marL="0">
+            <a:pPr marL="0" indent="0">
               <a:buNone/>
             </a:pPr>
             <a:r>
@@ -3882,7 +3831,7 @@
           <a:bodyPr wrap="square" lIns="0" tIns="0" rIns="0" bIns="0" rtlCol="0" anchor="ctr"/>
           <a:lstStyle/>
           <a:p>
-            <a:pPr indent="0" marL="0">
+            <a:pPr marL="0" indent="0">
               <a:buNone/>
             </a:pPr>
             <a:r>
@@ -3924,13 +3873,20 @@
             <a:prstDash val="solid"/>
           </a:ln>
           <a:effectLst>
-            <a:outerShdw sx="100000" sy="100000" kx="0" ky="0" algn="bl" rotWithShape="0" blurRad="76200" dist="25400" dir="8100000">
+            <a:outerShdw blurRad="76200" dist="25400" dir="8100000" algn="bl" rotWithShape="0">
               <a:srgbClr val="000000">
                 <a:alpha val="40000"/>
               </a:srgbClr>
             </a:outerShdw>
           </a:effectLst>
         </p:spPr>
+        <p:txBody>
+          <a:bodyPr/>
+          <a:lstStyle/>
+          <a:p>
+            <a:endParaRPr lang="en-US"/>
+          </a:p>
+        </p:txBody>
       </p:sp>
       <p:sp>
         <p:nvSpPr>
@@ -3951,6 +3907,13 @@
           </a:solidFill>
           <a:ln/>
         </p:spPr>
+        <p:txBody>
+          <a:bodyPr/>
+          <a:lstStyle/>
+          <a:p>
+            <a:endParaRPr lang="en-US"/>
+          </a:p>
+        </p:txBody>
       </p:sp>
       <p:sp>
         <p:nvSpPr>
@@ -3973,6 +3936,13 @@
           </a:solidFill>
           <a:ln/>
         </p:spPr>
+        <p:txBody>
+          <a:bodyPr/>
+          <a:lstStyle/>
+          <a:p>
+            <a:endParaRPr lang="en-US"/>
+          </a:p>
+        </p:txBody>
       </p:sp>
       <p:sp>
         <p:nvSpPr>
@@ -3995,7 +3965,7 @@
           <a:bodyPr wrap="square" lIns="0" tIns="0" rIns="0" bIns="0" rtlCol="0" anchor="ctr"/>
           <a:lstStyle/>
           <a:p>
-            <a:pPr algn="ctr" indent="0" marL="0">
+            <a:pPr marL="0" indent="0" algn="ctr">
               <a:buNone/>
             </a:pPr>
             <a:r>
@@ -4031,7 +4001,7 @@
           <a:bodyPr wrap="square" lIns="0" tIns="0" rIns="0" bIns="0" rtlCol="0" anchor="ctr"/>
           <a:lstStyle/>
           <a:p>
-            <a:pPr indent="0" marL="0">
+            <a:pPr marL="0" indent="0">
               <a:buNone/>
             </a:pPr>
             <a:r>
@@ -4070,7 +4040,7 @@
           <a:bodyPr wrap="square" lIns="0" tIns="0" rIns="0" bIns="0" rtlCol="0" anchor="ctr"/>
           <a:lstStyle/>
           <a:p>
-            <a:pPr indent="0" marL="0">
+            <a:pPr marL="0" indent="0">
               <a:buNone/>
             </a:pPr>
             <a:r>
@@ -4109,7 +4079,7 @@
           <a:bodyPr wrap="square" lIns="0" tIns="0" rIns="0" bIns="0" rtlCol="0" anchor="ctr"/>
           <a:lstStyle/>
           <a:p>
-            <a:pPr indent="0" marL="0">
+            <a:pPr marL="0" indent="0">
               <a:buNone/>
             </a:pPr>
             <a:r>
@@ -4151,13 +4121,20 @@
             <a:prstDash val="solid"/>
           </a:ln>
           <a:effectLst>
-            <a:outerShdw sx="100000" sy="100000" kx="0" ky="0" algn="bl" rotWithShape="0" blurRad="76200" dist="25400" dir="8100000">
+            <a:outerShdw blurRad="76200" dist="25400" dir="8100000" algn="bl" rotWithShape="0">
               <a:srgbClr val="000000">
                 <a:alpha val="40000"/>
               </a:srgbClr>
             </a:outerShdw>
           </a:effectLst>
         </p:spPr>
+        <p:txBody>
+          <a:bodyPr/>
+          <a:lstStyle/>
+          <a:p>
+            <a:endParaRPr lang="en-US"/>
+          </a:p>
+        </p:txBody>
       </p:sp>
       <p:sp>
         <p:nvSpPr>
@@ -4178,6 +4155,13 @@
           </a:solidFill>
           <a:ln/>
         </p:spPr>
+        <p:txBody>
+          <a:bodyPr/>
+          <a:lstStyle/>
+          <a:p>
+            <a:endParaRPr lang="en-US"/>
+          </a:p>
+        </p:txBody>
       </p:sp>
       <p:sp>
         <p:nvSpPr>
@@ -4200,6 +4184,13 @@
           </a:solidFill>
           <a:ln/>
         </p:spPr>
+        <p:txBody>
+          <a:bodyPr/>
+          <a:lstStyle/>
+          <a:p>
+            <a:endParaRPr lang="en-US"/>
+          </a:p>
+        </p:txBody>
       </p:sp>
       <p:sp>
         <p:nvSpPr>
@@ -4222,7 +4213,7 @@
           <a:bodyPr wrap="square" lIns="0" tIns="0" rIns="0" bIns="0" rtlCol="0" anchor="ctr"/>
           <a:lstStyle/>
           <a:p>
-            <a:pPr algn="ctr" indent="0" marL="0">
+            <a:pPr marL="0" indent="0" algn="ctr">
               <a:buNone/>
             </a:pPr>
             <a:r>
@@ -4258,7 +4249,7 @@
           <a:bodyPr wrap="square" lIns="0" tIns="0" rIns="0" bIns="0" rtlCol="0" anchor="ctr"/>
           <a:lstStyle/>
           <a:p>
-            <a:pPr indent="0" marL="0">
+            <a:pPr marL="0" indent="0">
               <a:buNone/>
             </a:pPr>
             <a:r>
@@ -4297,7 +4288,7 @@
           <a:bodyPr wrap="square" lIns="0" tIns="0" rIns="0" bIns="0" rtlCol="0" anchor="ctr"/>
           <a:lstStyle/>
           <a:p>
-            <a:pPr indent="0" marL="0">
+            <a:pPr marL="0" indent="0">
               <a:buNone/>
             </a:pPr>
             <a:r>
@@ -4336,7 +4327,7 @@
           <a:bodyPr wrap="square" lIns="0" tIns="0" rIns="0" bIns="0" rtlCol="0" anchor="ctr"/>
           <a:lstStyle/>
           <a:p>
-            <a:pPr indent="0" marL="0">
+            <a:pPr marL="0" indent="0">
               <a:buNone/>
             </a:pPr>
             <a:r>
@@ -4378,13 +4369,20 @@
             <a:prstDash val="solid"/>
           </a:ln>
           <a:effectLst>
-            <a:outerShdw sx="100000" sy="100000" kx="0" ky="0" algn="bl" rotWithShape="0" blurRad="76200" dist="25400" dir="8100000">
+            <a:outerShdw blurRad="76200" dist="25400" dir="8100000" algn="bl" rotWithShape="0">
               <a:srgbClr val="000000">
                 <a:alpha val="40000"/>
               </a:srgbClr>
             </a:outerShdw>
           </a:effectLst>
         </p:spPr>
+        <p:txBody>
+          <a:bodyPr/>
+          <a:lstStyle/>
+          <a:p>
+            <a:endParaRPr lang="en-US"/>
+          </a:p>
+        </p:txBody>
       </p:sp>
       <p:sp>
         <p:nvSpPr>
@@ -4405,6 +4403,13 @@
           </a:solidFill>
           <a:ln/>
         </p:spPr>
+        <p:txBody>
+          <a:bodyPr/>
+          <a:lstStyle/>
+          <a:p>
+            <a:endParaRPr lang="en-US"/>
+          </a:p>
+        </p:txBody>
       </p:sp>
       <p:sp>
         <p:nvSpPr>
@@ -4427,6 +4432,13 @@
           </a:solidFill>
           <a:ln/>
         </p:spPr>
+        <p:txBody>
+          <a:bodyPr/>
+          <a:lstStyle/>
+          <a:p>
+            <a:endParaRPr lang="en-US"/>
+          </a:p>
+        </p:txBody>
       </p:sp>
       <p:sp>
         <p:nvSpPr>
@@ -4449,7 +4461,7 @@
           <a:bodyPr wrap="square" lIns="0" tIns="0" rIns="0" bIns="0" rtlCol="0" anchor="ctr"/>
           <a:lstStyle/>
           <a:p>
-            <a:pPr algn="ctr" indent="0" marL="0">
+            <a:pPr marL="0" indent="0" algn="ctr">
               <a:buNone/>
             </a:pPr>
             <a:r>
@@ -4485,7 +4497,7 @@
           <a:bodyPr wrap="square" lIns="0" tIns="0" rIns="0" bIns="0" rtlCol="0" anchor="ctr"/>
           <a:lstStyle/>
           <a:p>
-            <a:pPr indent="0" marL="0">
+            <a:pPr marL="0" indent="0">
               <a:buNone/>
             </a:pPr>
             <a:r>
@@ -4524,7 +4536,7 @@
           <a:bodyPr wrap="square" lIns="0" tIns="0" rIns="0" bIns="0" rtlCol="0" anchor="ctr"/>
           <a:lstStyle/>
           <a:p>
-            <a:pPr indent="0" marL="0">
+            <a:pPr marL="0" indent="0">
               <a:buNone/>
             </a:pPr>
             <a:r>
@@ -4563,7 +4575,7 @@
           <a:bodyPr wrap="square" lIns="0" tIns="0" rIns="0" bIns="0" rtlCol="0" anchor="ctr"/>
           <a:lstStyle/>
           <a:p>
-            <a:pPr indent="0" marL="0">
+            <a:pPr marL="0" indent="0">
               <a:buNone/>
             </a:pPr>
             <a:r>
@@ -4605,13 +4617,20 @@
             <a:prstDash val="solid"/>
           </a:ln>
           <a:effectLst>
-            <a:outerShdw sx="100000" sy="100000" kx="0" ky="0" algn="bl" rotWithShape="0" blurRad="76200" dist="25400" dir="8100000">
+            <a:outerShdw blurRad="76200" dist="25400" dir="8100000" algn="bl" rotWithShape="0">
               <a:srgbClr val="000000">
                 <a:alpha val="40000"/>
               </a:srgbClr>
             </a:outerShdw>
           </a:effectLst>
         </p:spPr>
+        <p:txBody>
+          <a:bodyPr/>
+          <a:lstStyle/>
+          <a:p>
+            <a:endParaRPr lang="en-US"/>
+          </a:p>
+        </p:txBody>
       </p:sp>
       <p:sp>
         <p:nvSpPr>
@@ -4632,6 +4651,13 @@
           </a:solidFill>
           <a:ln/>
         </p:spPr>
+        <p:txBody>
+          <a:bodyPr/>
+          <a:lstStyle/>
+          <a:p>
+            <a:endParaRPr lang="en-US"/>
+          </a:p>
+        </p:txBody>
       </p:sp>
       <p:sp>
         <p:nvSpPr>
@@ -4654,6 +4680,13 @@
           </a:solidFill>
           <a:ln/>
         </p:spPr>
+        <p:txBody>
+          <a:bodyPr/>
+          <a:lstStyle/>
+          <a:p>
+            <a:endParaRPr lang="en-US"/>
+          </a:p>
+        </p:txBody>
       </p:sp>
       <p:sp>
         <p:nvSpPr>
@@ -4676,7 +4709,7 @@
           <a:bodyPr wrap="square" lIns="0" tIns="0" rIns="0" bIns="0" rtlCol="0" anchor="ctr"/>
           <a:lstStyle/>
           <a:p>
-            <a:pPr algn="ctr" indent="0" marL="0">
+            <a:pPr marL="0" indent="0" algn="ctr">
               <a:buNone/>
             </a:pPr>
             <a:r>
@@ -4712,7 +4745,7 @@
           <a:bodyPr wrap="square" lIns="0" tIns="0" rIns="0" bIns="0" rtlCol="0" anchor="ctr"/>
           <a:lstStyle/>
           <a:p>
-            <a:pPr indent="0" marL="0">
+            <a:pPr marL="0" indent="0">
               <a:buNone/>
             </a:pPr>
             <a:r>
@@ -4751,7 +4784,7 @@
           <a:bodyPr wrap="square" lIns="0" tIns="0" rIns="0" bIns="0" rtlCol="0" anchor="ctr"/>
           <a:lstStyle/>
           <a:p>
-            <a:pPr indent="0" marL="0">
+            <a:pPr marL="0" indent="0">
               <a:buNone/>
             </a:pPr>
             <a:r>
@@ -4790,7 +4823,7 @@
           <a:bodyPr wrap="square" lIns="0" tIns="0" rIns="0" bIns="0" rtlCol="0" anchor="ctr"/>
           <a:lstStyle/>
           <a:p>
-            <a:pPr indent="0" marL="0">
+            <a:pPr marL="0" indent="0">
               <a:buNone/>
             </a:pPr>
             <a:r>
@@ -4832,13 +4865,20 @@
             <a:prstDash val="solid"/>
           </a:ln>
           <a:effectLst>
-            <a:outerShdw sx="100000" sy="100000" kx="0" ky="0" algn="bl" rotWithShape="0" blurRad="76200" dist="25400" dir="8100000">
+            <a:outerShdw blurRad="76200" dist="25400" dir="8100000" algn="bl" rotWithShape="0">
               <a:srgbClr val="000000">
                 <a:alpha val="40000"/>
               </a:srgbClr>
             </a:outerShdw>
           </a:effectLst>
         </p:spPr>
+        <p:txBody>
+          <a:bodyPr/>
+          <a:lstStyle/>
+          <a:p>
+            <a:endParaRPr lang="en-US"/>
+          </a:p>
+        </p:txBody>
       </p:sp>
       <p:sp>
         <p:nvSpPr>
@@ -4859,6 +4899,13 @@
           </a:solidFill>
           <a:ln/>
         </p:spPr>
+        <p:txBody>
+          <a:bodyPr/>
+          <a:lstStyle/>
+          <a:p>
+            <a:endParaRPr lang="en-US"/>
+          </a:p>
+        </p:txBody>
       </p:sp>
       <p:sp>
         <p:nvSpPr>
@@ -4881,6 +4928,13 @@
           </a:solidFill>
           <a:ln/>
         </p:spPr>
+        <p:txBody>
+          <a:bodyPr/>
+          <a:lstStyle/>
+          <a:p>
+            <a:endParaRPr lang="en-US"/>
+          </a:p>
+        </p:txBody>
       </p:sp>
       <p:sp>
         <p:nvSpPr>
@@ -4903,7 +4957,7 @@
           <a:bodyPr wrap="square" lIns="0" tIns="0" rIns="0" bIns="0" rtlCol="0" anchor="ctr"/>
           <a:lstStyle/>
           <a:p>
-            <a:pPr algn="ctr" indent="0" marL="0">
+            <a:pPr marL="0" indent="0" algn="ctr">
               <a:buNone/>
             </a:pPr>
             <a:r>
@@ -4939,7 +4993,7 @@
           <a:bodyPr wrap="square" lIns="0" tIns="0" rIns="0" bIns="0" rtlCol="0" anchor="ctr"/>
           <a:lstStyle/>
           <a:p>
-            <a:pPr indent="0" marL="0">
+            <a:pPr marL="0" indent="0">
               <a:buNone/>
             </a:pPr>
             <a:r>
@@ -4978,7 +5032,7 @@
           <a:bodyPr wrap="square" lIns="0" tIns="0" rIns="0" bIns="0" rtlCol="0" anchor="ctr"/>
           <a:lstStyle/>
           <a:p>
-            <a:pPr indent="0" marL="0">
+            <a:pPr marL="0" indent="0">
               <a:buNone/>
             </a:pPr>
             <a:r>
@@ -5017,7 +5071,7 @@
           <a:bodyPr wrap="square" lIns="0" tIns="0" rIns="0" bIns="0" rtlCol="0" anchor="ctr"/>
           <a:lstStyle/>
           <a:p>
-            <a:pPr indent="0" marL="0">
+            <a:pPr marL="0" indent="0">
               <a:buNone/>
             </a:pPr>
             <a:r>
@@ -5059,13 +5113,20 @@
             <a:prstDash val="solid"/>
           </a:ln>
           <a:effectLst>
-            <a:outerShdw sx="100000" sy="100000" kx="0" ky="0" algn="bl" rotWithShape="0" blurRad="76200" dist="25400" dir="8100000">
+            <a:outerShdw blurRad="76200" dist="25400" dir="8100000" algn="bl" rotWithShape="0">
               <a:srgbClr val="000000">
                 <a:alpha val="40000"/>
               </a:srgbClr>
             </a:outerShdw>
           </a:effectLst>
         </p:spPr>
+        <p:txBody>
+          <a:bodyPr/>
+          <a:lstStyle/>
+          <a:p>
+            <a:endParaRPr lang="en-US"/>
+          </a:p>
+        </p:txBody>
       </p:sp>
       <p:sp>
         <p:nvSpPr>
@@ -5086,6 +5147,13 @@
           </a:solidFill>
           <a:ln/>
         </p:spPr>
+        <p:txBody>
+          <a:bodyPr/>
+          <a:lstStyle/>
+          <a:p>
+            <a:endParaRPr lang="en-US"/>
+          </a:p>
+        </p:txBody>
       </p:sp>
       <p:sp>
         <p:nvSpPr>
@@ -5108,6 +5176,13 @@
           </a:solidFill>
           <a:ln/>
         </p:spPr>
+        <p:txBody>
+          <a:bodyPr/>
+          <a:lstStyle/>
+          <a:p>
+            <a:endParaRPr lang="en-US"/>
+          </a:p>
+        </p:txBody>
       </p:sp>
       <p:sp>
         <p:nvSpPr>
@@ -5130,7 +5205,7 @@
           <a:bodyPr wrap="square" lIns="0" tIns="0" rIns="0" bIns="0" rtlCol="0" anchor="ctr"/>
           <a:lstStyle/>
           <a:p>
-            <a:pPr algn="ctr" indent="0" marL="0">
+            <a:pPr marL="0" indent="0" algn="ctr">
               <a:buNone/>
             </a:pPr>
             <a:r>
@@ -5166,7 +5241,7 @@
           <a:bodyPr wrap="square" lIns="0" tIns="0" rIns="0" bIns="0" rtlCol="0" anchor="ctr"/>
           <a:lstStyle/>
           <a:p>
-            <a:pPr indent="0" marL="0">
+            <a:pPr marL="0" indent="0">
               <a:buNone/>
             </a:pPr>
             <a:r>
@@ -5205,7 +5280,7 @@
           <a:bodyPr wrap="square" lIns="0" tIns="0" rIns="0" bIns="0" rtlCol="0" anchor="ctr"/>
           <a:lstStyle/>
           <a:p>
-            <a:pPr indent="0" marL="0">
+            <a:pPr marL="0" indent="0">
               <a:buNone/>
             </a:pPr>
             <a:r>
@@ -5244,7 +5319,7 @@
           <a:bodyPr wrap="square" lIns="0" tIns="0" rIns="0" bIns="0" rtlCol="0" anchor="ctr"/>
           <a:lstStyle/>
           <a:p>
-            <a:pPr indent="0" marL="0">
+            <a:pPr marL="0" indent="0">
               <a:buNone/>
             </a:pPr>
             <a:r>
@@ -5286,13 +5361,20 @@
             <a:prstDash val="solid"/>
           </a:ln>
           <a:effectLst>
-            <a:outerShdw sx="100000" sy="100000" kx="0" ky="0" algn="bl" rotWithShape="0" blurRad="76200" dist="25400" dir="8100000">
+            <a:outerShdw blurRad="76200" dist="25400" dir="8100000" algn="bl" rotWithShape="0">
               <a:srgbClr val="000000">
                 <a:alpha val="40000"/>
               </a:srgbClr>
             </a:outerShdw>
           </a:effectLst>
         </p:spPr>
+        <p:txBody>
+          <a:bodyPr/>
+          <a:lstStyle/>
+          <a:p>
+            <a:endParaRPr lang="en-US"/>
+          </a:p>
+        </p:txBody>
       </p:sp>
       <p:sp>
         <p:nvSpPr>
@@ -5313,6 +5395,13 @@
           </a:solidFill>
           <a:ln/>
         </p:spPr>
+        <p:txBody>
+          <a:bodyPr/>
+          <a:lstStyle/>
+          <a:p>
+            <a:endParaRPr lang="en-US"/>
+          </a:p>
+        </p:txBody>
       </p:sp>
       <p:sp>
         <p:nvSpPr>
@@ -5335,6 +5424,13 @@
           </a:solidFill>
           <a:ln/>
         </p:spPr>
+        <p:txBody>
+          <a:bodyPr/>
+          <a:lstStyle/>
+          <a:p>
+            <a:endParaRPr lang="en-US"/>
+          </a:p>
+        </p:txBody>
       </p:sp>
       <p:sp>
         <p:nvSpPr>
@@ -5357,7 +5453,7 @@
           <a:bodyPr wrap="square" lIns="0" tIns="0" rIns="0" bIns="0" rtlCol="0" anchor="ctr"/>
           <a:lstStyle/>
           <a:p>
-            <a:pPr algn="ctr" indent="0" marL="0">
+            <a:pPr marL="0" indent="0" algn="ctr">
               <a:buNone/>
             </a:pPr>
             <a:r>
@@ -5393,7 +5489,7 @@
           <a:bodyPr wrap="square" lIns="0" tIns="0" rIns="0" bIns="0" rtlCol="0" anchor="ctr"/>
           <a:lstStyle/>
           <a:p>
-            <a:pPr indent="0" marL="0">
+            <a:pPr marL="0" indent="0">
               <a:buNone/>
             </a:pPr>
             <a:r>
@@ -5432,7 +5528,7 @@
           <a:bodyPr wrap="square" lIns="0" tIns="0" rIns="0" bIns="0" rtlCol="0" anchor="ctr"/>
           <a:lstStyle/>
           <a:p>
-            <a:pPr indent="0" marL="0">
+            <a:pPr marL="0" indent="0">
               <a:buNone/>
             </a:pPr>
             <a:r>
@@ -5471,7 +5567,7 @@
           <a:bodyPr wrap="square" lIns="0" tIns="0" rIns="0" bIns="0" rtlCol="0" anchor="ctr"/>
           <a:lstStyle/>
           <a:p>
-            <a:pPr indent="0" marL="0">
+            <a:pPr marL="0" indent="0">
               <a:buNone/>
             </a:pPr>
             <a:r>
@@ -5512,6 +5608,13 @@
             <a:tailEnd type="arrow"/>
           </a:ln>
         </p:spPr>
+        <p:txBody>
+          <a:bodyPr/>
+          <a:lstStyle/>
+          <a:p>
+            <a:endParaRPr lang="en-US"/>
+          </a:p>
+        </p:txBody>
       </p:sp>
       <p:sp>
         <p:nvSpPr>
@@ -5534,7 +5637,7 @@
           <a:bodyPr wrap="square" lIns="0" tIns="0" rIns="0" bIns="0" rtlCol="0" anchor="ctr"/>
           <a:lstStyle/>
           <a:p>
-            <a:pPr algn="ctr" indent="0" marL="0">
+            <a:pPr marL="0" indent="0" algn="ctr">
               <a:buNone/>
             </a:pPr>
             <a:r>
@@ -5572,6 +5675,13 @@
             <a:tailEnd type="arrow"/>
           </a:ln>
         </p:spPr>
+        <p:txBody>
+          <a:bodyPr/>
+          <a:lstStyle/>
+          <a:p>
+            <a:endParaRPr lang="en-US"/>
+          </a:p>
+        </p:txBody>
       </p:sp>
       <p:sp>
         <p:nvSpPr>
@@ -5594,7 +5704,7 @@
           <a:bodyPr wrap="square" lIns="0" tIns="0" rIns="0" bIns="0" rtlCol="0" anchor="ctr"/>
           <a:lstStyle/>
           <a:p>
-            <a:pPr algn="ctr" indent="0" marL="0">
+            <a:pPr marL="0" indent="0" algn="ctr">
               <a:buNone/>
             </a:pPr>
             <a:r>
@@ -5632,6 +5742,13 @@
             <a:tailEnd type="arrow"/>
           </a:ln>
         </p:spPr>
+        <p:txBody>
+          <a:bodyPr/>
+          <a:lstStyle/>
+          <a:p>
+            <a:endParaRPr lang="en-US"/>
+          </a:p>
+        </p:txBody>
       </p:sp>
       <p:sp>
         <p:nvSpPr>
@@ -5654,7 +5771,7 @@
           <a:bodyPr wrap="square" lIns="0" tIns="0" rIns="0" bIns="0" rtlCol="0" anchor="ctr"/>
           <a:lstStyle/>
           <a:p>
-            <a:pPr algn="ctr" indent="0" marL="0">
+            <a:pPr marL="0" indent="0" algn="ctr">
               <a:buNone/>
             </a:pPr>
             <a:r>
@@ -5692,6 +5809,13 @@
             <a:tailEnd type="arrow"/>
           </a:ln>
         </p:spPr>
+        <p:txBody>
+          <a:bodyPr/>
+          <a:lstStyle/>
+          <a:p>
+            <a:endParaRPr lang="en-US"/>
+          </a:p>
+        </p:txBody>
       </p:sp>
       <p:sp>
         <p:nvSpPr>
@@ -5701,7 +5825,7 @@
         </p:nvSpPr>
         <p:spPr>
           <a:xfrm>
-            <a:off x="5349240" y="2185416"/>
+            <a:off x="5340096" y="2385391"/>
             <a:ext cx="1097280" cy="182880"/>
           </a:xfrm>
           <a:prstGeom prst="rect">
@@ -5714,7 +5838,7 @@
           <a:bodyPr wrap="square" lIns="0" tIns="0" rIns="0" bIns="0" rtlCol="0" anchor="ctr"/>
           <a:lstStyle/>
           <a:p>
-            <a:pPr algn="ctr" indent="0" marL="0">
+            <a:pPr marL="0" indent="0" algn="ctr">
               <a:buNone/>
             </a:pPr>
             <a:r>
@@ -5752,6 +5876,13 @@
             <a:tailEnd type="arrow"/>
           </a:ln>
         </p:spPr>
+        <p:txBody>
+          <a:bodyPr/>
+          <a:lstStyle/>
+          <a:p>
+            <a:endParaRPr lang="en-US"/>
+          </a:p>
+        </p:txBody>
       </p:sp>
       <p:sp>
         <p:nvSpPr>
@@ -5776,6 +5907,13 @@
             <a:tailEnd type="arrow"/>
           </a:ln>
         </p:spPr>
+        <p:txBody>
+          <a:bodyPr/>
+          <a:lstStyle/>
+          <a:p>
+            <a:endParaRPr lang="en-US"/>
+          </a:p>
+        </p:txBody>
       </p:sp>
       <p:sp>
         <p:nvSpPr>
@@ -5798,7 +5936,7 @@
           <a:bodyPr wrap="square" lIns="0" tIns="0" rIns="0" bIns="0" rtlCol="0" anchor="ctr"/>
           <a:lstStyle/>
           <a:p>
-            <a:pPr algn="ctr" indent="0" marL="0">
+            <a:pPr marL="0" indent="0" algn="ctr">
               <a:buNone/>
             </a:pPr>
             <a:r>
@@ -5822,7 +5960,7 @@
         <p:spPr>
           <a:xfrm>
             <a:off x="2926080" y="3410712"/>
-            <a:ext cx="-9144" cy="-786384"/>
+            <a:ext cx="0" cy="0"/>
           </a:xfrm>
           <a:prstGeom prst="line">
             <a:avLst/>
@@ -5836,6 +5974,13 @@
             <a:tailEnd type="arrow"/>
           </a:ln>
         </p:spPr>
+        <p:txBody>
+          <a:bodyPr/>
+          <a:lstStyle/>
+          <a:p>
+            <a:endParaRPr lang="en-US"/>
+          </a:p>
+        </p:txBody>
       </p:sp>
       <p:sp>
         <p:nvSpPr>
@@ -5858,7 +6003,7 @@
           <a:bodyPr wrap="square" lIns="0" tIns="0" rIns="0" bIns="0" rtlCol="0" anchor="ctr"/>
           <a:lstStyle/>
           <a:p>
-            <a:pPr algn="ctr" indent="0" marL="0">
+            <a:pPr marL="0" indent="0" algn="ctr">
               <a:buNone/>
             </a:pPr>
             <a:r>
@@ -5896,6 +6041,13 @@
             <a:tailEnd type="arrow"/>
           </a:ln>
         </p:spPr>
+        <p:txBody>
+          <a:bodyPr/>
+          <a:lstStyle/>
+          <a:p>
+            <a:endParaRPr lang="en-US"/>
+          </a:p>
+        </p:txBody>
       </p:sp>
       <p:sp>
         <p:nvSpPr>
@@ -5918,7 +6070,7 @@
           <a:bodyPr wrap="square" lIns="0" tIns="0" rIns="0" bIns="0" rtlCol="0" anchor="ctr"/>
           <a:lstStyle/>
           <a:p>
-            <a:pPr algn="ctr" indent="0" marL="0">
+            <a:pPr marL="0" indent="0" algn="ctr">
               <a:buNone/>
             </a:pPr>
             <a:r>
@@ -5956,6 +6108,13 @@
             <a:tailEnd type="arrow"/>
           </a:ln>
         </p:spPr>
+        <p:txBody>
+          <a:bodyPr/>
+          <a:lstStyle/>
+          <a:p>
+            <a:endParaRPr lang="en-US"/>
+          </a:p>
+        </p:txBody>
       </p:sp>
       <p:sp>
         <p:nvSpPr>
@@ -5978,7 +6137,7 @@
           <a:bodyPr wrap="square" lIns="0" tIns="0" rIns="0" bIns="0" rtlCol="0" anchor="ctr"/>
           <a:lstStyle/>
           <a:p>
-            <a:pPr algn="ctr" indent="0" marL="0">
+            <a:pPr marL="0" indent="0" algn="ctr">
               <a:buNone/>
             </a:pPr>
             <a:r>
@@ -6016,6 +6175,13 @@
             <a:tailEnd type="arrow"/>
           </a:ln>
         </p:spPr>
+        <p:txBody>
+          <a:bodyPr/>
+          <a:lstStyle/>
+          <a:p>
+            <a:endParaRPr lang="en-US"/>
+          </a:p>
+        </p:txBody>
       </p:sp>
       <p:sp>
         <p:nvSpPr>
@@ -6038,7 +6204,7 @@
           <a:bodyPr wrap="square" lIns="0" tIns="0" rIns="0" bIns="0" rtlCol="0" anchor="ctr"/>
           <a:lstStyle/>
           <a:p>
-            <a:pPr algn="ctr" indent="0" marL="0">
+            <a:pPr marL="0" indent="0" algn="ctr">
               <a:buNone/>
             </a:pPr>
             <a:r>
@@ -6076,6 +6242,13 @@
             <a:tailEnd type="arrow"/>
           </a:ln>
         </p:spPr>
+        <p:txBody>
+          <a:bodyPr/>
+          <a:lstStyle/>
+          <a:p>
+            <a:endParaRPr lang="en-US"/>
+          </a:p>
+        </p:txBody>
       </p:sp>
       <p:sp>
         <p:nvSpPr>
@@ -6098,7 +6271,7 @@
           <a:bodyPr wrap="square" lIns="0" tIns="0" rIns="0" bIns="0" rtlCol="0" anchor="ctr"/>
           <a:lstStyle/>
           <a:p>
-            <a:pPr algn="ctr" indent="0" marL="0">
+            <a:pPr marL="0" indent="0" algn="ctr">
               <a:buNone/>
             </a:pPr>
             <a:r>
@@ -6129,6 +6302,7 @@
         <a:solidFill>
           <a:srgbClr val="0D1117"/>
         </a:solidFill>
+        <a:effectLst/>
       </p:bgPr>
     </p:bg>
     <p:spTree>
@@ -6164,6 +6338,13 @@
           </a:solidFill>
           <a:ln/>
         </p:spPr>
+        <p:txBody>
+          <a:bodyPr/>
+          <a:lstStyle/>
+          <a:p>
+            <a:endParaRPr lang="en-US"/>
+          </a:p>
+        </p:txBody>
       </p:sp>
       <p:sp>
         <p:nvSpPr>
@@ -6186,11 +6367,11 @@
           <a:bodyPr wrap="square" lIns="0" tIns="0" rIns="0" bIns="0" rtlCol="0" anchor="ctr"/>
           <a:lstStyle/>
           <a:p>
-            <a:pPr indent="0" marL="0">
-              <a:buNone/>
-            </a:pPr>
-            <a:r>
-              <a:rPr lang="en-US" sz="1300" b="1" spc="300" kern="0" dirty="0">
+            <a:pPr marL="0" indent="0">
+              <a:buNone/>
+            </a:pPr>
+            <a:r>
+              <a:rPr lang="en-US" sz="1300" b="1" kern="0" spc="300" dirty="0">
                 <a:solidFill>
                   <a:srgbClr val="FFFFFF"/>
                 </a:solidFill>
@@ -6222,7 +6403,7 @@
           <a:bodyPr wrap="square" lIns="0" tIns="0" rIns="0" bIns="0" rtlCol="0" anchor="ctr"/>
           <a:lstStyle/>
           <a:p>
-            <a:pPr algn="r" indent="0" marL="0">
+            <a:pPr marL="0" indent="0" algn="r">
               <a:buNone/>
             </a:pPr>
             <a:r>
@@ -6261,6 +6442,13 @@
             <a:prstDash val="solid"/>
           </a:ln>
         </p:spPr>
+        <p:txBody>
+          <a:bodyPr/>
+          <a:lstStyle/>
+          <a:p>
+            <a:endParaRPr lang="en-US"/>
+          </a:p>
+        </p:txBody>
       </p:sp>
       <p:sp>
         <p:nvSpPr>
@@ -6281,6 +6469,13 @@
           </a:solidFill>
           <a:ln/>
         </p:spPr>
+        <p:txBody>
+          <a:bodyPr/>
+          <a:lstStyle/>
+          <a:p>
+            <a:endParaRPr lang="en-US"/>
+          </a:p>
+        </p:txBody>
       </p:sp>
       <p:sp>
         <p:nvSpPr>
@@ -6303,7 +6498,7 @@
           <a:bodyPr wrap="square" lIns="0" tIns="0" rIns="0" bIns="0" rtlCol="0" anchor="ctr"/>
           <a:lstStyle/>
           <a:p>
-            <a:pPr indent="0" marL="0">
+            <a:pPr marL="0" indent="0">
               <a:buNone/>
             </a:pPr>
             <a:r>
@@ -6337,6 +6532,13 @@
           </a:solidFill>
           <a:ln/>
         </p:spPr>
+        <p:txBody>
+          <a:bodyPr/>
+          <a:lstStyle/>
+          <a:p>
+            <a:endParaRPr lang="en-US"/>
+          </a:p>
+        </p:txBody>
       </p:sp>
       <p:sp>
         <p:nvSpPr>
@@ -6359,7 +6561,7 @@
           <a:bodyPr wrap="square" lIns="0" tIns="0" rIns="0" bIns="0" rtlCol="0" anchor="ctr"/>
           <a:lstStyle/>
           <a:p>
-            <a:pPr algn="ctr" indent="0" marL="0">
+            <a:pPr marL="0" indent="0" algn="ctr">
               <a:buNone/>
             </a:pPr>
             <a:r>
@@ -6395,7 +6597,7 @@
           <a:bodyPr wrap="square" rtlCol="0" anchor="ctr"/>
           <a:lstStyle/>
           <a:p>
-            <a:pPr indent="0" marL="0">
+            <a:pPr marL="0" indent="0">
               <a:buNone/>
             </a:pPr>
             <a:r>
@@ -6432,6 +6634,13 @@
           </a:solidFill>
           <a:ln/>
         </p:spPr>
+        <p:txBody>
+          <a:bodyPr/>
+          <a:lstStyle/>
+          <a:p>
+            <a:endParaRPr lang="en-US"/>
+          </a:p>
+        </p:txBody>
       </p:sp>
       <p:sp>
         <p:nvSpPr>
@@ -6454,7 +6663,7 @@
           <a:bodyPr wrap="square" lIns="0" tIns="0" rIns="0" bIns="0" rtlCol="0" anchor="ctr"/>
           <a:lstStyle/>
           <a:p>
-            <a:pPr algn="ctr" indent="0" marL="0">
+            <a:pPr marL="0" indent="0" algn="ctr">
               <a:buNone/>
             </a:pPr>
             <a:r>
@@ -6490,7 +6699,7 @@
           <a:bodyPr wrap="square" rtlCol="0" anchor="ctr"/>
           <a:lstStyle/>
           <a:p>
-            <a:pPr indent="0" marL="0">
+            <a:pPr marL="0" indent="0">
               <a:buNone/>
             </a:pPr>
             <a:r>
@@ -6527,6 +6736,13 @@
           </a:solidFill>
           <a:ln/>
         </p:spPr>
+        <p:txBody>
+          <a:bodyPr/>
+          <a:lstStyle/>
+          <a:p>
+            <a:endParaRPr lang="en-US"/>
+          </a:p>
+        </p:txBody>
       </p:sp>
       <p:sp>
         <p:nvSpPr>
@@ -6549,7 +6765,7 @@
           <a:bodyPr wrap="square" lIns="0" tIns="0" rIns="0" bIns="0" rtlCol="0" anchor="ctr"/>
           <a:lstStyle/>
           <a:p>
-            <a:pPr algn="ctr" indent="0" marL="0">
+            <a:pPr marL="0" indent="0" algn="ctr">
               <a:buNone/>
             </a:pPr>
             <a:r>
@@ -6585,7 +6801,7 @@
           <a:bodyPr wrap="square" rtlCol="0" anchor="ctr"/>
           <a:lstStyle/>
           <a:p>
-            <a:pPr indent="0" marL="0">
+            <a:pPr marL="0" indent="0">
               <a:buNone/>
             </a:pPr>
             <a:r>
@@ -6622,6 +6838,13 @@
           </a:solidFill>
           <a:ln/>
         </p:spPr>
+        <p:txBody>
+          <a:bodyPr/>
+          <a:lstStyle/>
+          <a:p>
+            <a:endParaRPr lang="en-US"/>
+          </a:p>
+        </p:txBody>
       </p:sp>
       <p:sp>
         <p:nvSpPr>
@@ -6644,7 +6867,7 @@
           <a:bodyPr wrap="square" lIns="0" tIns="0" rIns="0" bIns="0" rtlCol="0" anchor="ctr"/>
           <a:lstStyle/>
           <a:p>
-            <a:pPr algn="ctr" indent="0" marL="0">
+            <a:pPr marL="0" indent="0" algn="ctr">
               <a:buNone/>
             </a:pPr>
             <a:r>
@@ -6680,7 +6903,7 @@
           <a:bodyPr wrap="square" rtlCol="0" anchor="ctr"/>
           <a:lstStyle/>
           <a:p>
-            <a:pPr indent="0" marL="0">
+            <a:pPr marL="0" indent="0">
               <a:buNone/>
             </a:pPr>
             <a:r>
@@ -6717,6 +6940,13 @@
           </a:solidFill>
           <a:ln/>
         </p:spPr>
+        <p:txBody>
+          <a:bodyPr/>
+          <a:lstStyle/>
+          <a:p>
+            <a:endParaRPr lang="en-US"/>
+          </a:p>
+        </p:txBody>
       </p:sp>
       <p:sp>
         <p:nvSpPr>
@@ -6739,7 +6969,7 @@
           <a:bodyPr wrap="square" lIns="0" tIns="0" rIns="0" bIns="0" rtlCol="0" anchor="ctr"/>
           <a:lstStyle/>
           <a:p>
-            <a:pPr algn="ctr" indent="0" marL="0">
+            <a:pPr marL="0" indent="0" algn="ctr">
               <a:buNone/>
             </a:pPr>
             <a:r>
@@ -6775,7 +7005,7 @@
           <a:bodyPr wrap="square" rtlCol="0" anchor="ctr"/>
           <a:lstStyle/>
           <a:p>
-            <a:pPr indent="0" marL="0">
+            <a:pPr marL="0" indent="0">
               <a:buNone/>
             </a:pPr>
             <a:r>
@@ -6812,6 +7042,13 @@
           </a:solidFill>
           <a:ln/>
         </p:spPr>
+        <p:txBody>
+          <a:bodyPr/>
+          <a:lstStyle/>
+          <a:p>
+            <a:endParaRPr lang="en-US"/>
+          </a:p>
+        </p:txBody>
       </p:sp>
       <p:sp>
         <p:nvSpPr>
@@ -6834,7 +7071,7 @@
           <a:bodyPr wrap="square" lIns="0" tIns="0" rIns="0" bIns="0" rtlCol="0" anchor="ctr"/>
           <a:lstStyle/>
           <a:p>
-            <a:pPr algn="ctr" indent="0" marL="0">
+            <a:pPr marL="0" indent="0" algn="ctr">
               <a:buNone/>
             </a:pPr>
             <a:r>
@@ -6870,7 +7107,7 @@
           <a:bodyPr wrap="square" rtlCol="0" anchor="ctr"/>
           <a:lstStyle/>
           <a:p>
-            <a:pPr indent="0" marL="0">
+            <a:pPr marL="0" indent="0">
               <a:buNone/>
             </a:pPr>
             <a:r>
@@ -6909,6 +7146,13 @@
           </a:solidFill>
           <a:ln/>
         </p:spPr>
+        <p:txBody>
+          <a:bodyPr/>
+          <a:lstStyle/>
+          <a:p>
+            <a:endParaRPr lang="en-US"/>
+          </a:p>
+        </p:txBody>
       </p:sp>
       <p:sp>
         <p:nvSpPr>
@@ -6931,7 +7175,7 @@
           <a:bodyPr wrap="square" lIns="0" tIns="0" rIns="0" bIns="0" rtlCol="0" anchor="ctr"/>
           <a:lstStyle/>
           <a:p>
-            <a:pPr indent="0" marL="0">
+            <a:pPr marL="0" indent="0">
               <a:buNone/>
             </a:pPr>
             <a:r>
@@ -6970,6 +7214,13 @@
             <a:prstDash val="solid"/>
           </a:ln>
         </p:spPr>
+        <p:txBody>
+          <a:bodyPr/>
+          <a:lstStyle/>
+          <a:p>
+            <a:endParaRPr lang="en-US"/>
+          </a:p>
+        </p:txBody>
       </p:sp>
       <p:sp>
         <p:nvSpPr>
@@ -6990,6 +7241,13 @@
           </a:solidFill>
           <a:ln/>
         </p:spPr>
+        <p:txBody>
+          <a:bodyPr/>
+          <a:lstStyle/>
+          <a:p>
+            <a:endParaRPr lang="en-US"/>
+          </a:p>
+        </p:txBody>
       </p:sp>
       <p:sp>
         <p:nvSpPr>
@@ -7012,7 +7270,7 @@
           <a:bodyPr wrap="square" lIns="0" tIns="0" rIns="0" bIns="0" rtlCol="0" anchor="ctr"/>
           <a:lstStyle/>
           <a:p>
-            <a:pPr indent="0" marL="0">
+            <a:pPr marL="0" indent="0">
               <a:buNone/>
             </a:pPr>
             <a:r>
@@ -7046,6 +7304,13 @@
           </a:solidFill>
           <a:ln/>
         </p:spPr>
+        <p:txBody>
+          <a:bodyPr/>
+          <a:lstStyle/>
+          <a:p>
+            <a:endParaRPr lang="en-US"/>
+          </a:p>
+        </p:txBody>
       </p:sp>
       <p:sp>
         <p:nvSpPr>
@@ -7068,7 +7333,7 @@
           <a:bodyPr wrap="square" lIns="0" tIns="0" rIns="0" bIns="0" rtlCol="0" anchor="ctr"/>
           <a:lstStyle/>
           <a:p>
-            <a:pPr algn="ctr" indent="0" marL="0">
+            <a:pPr marL="0" indent="0" algn="ctr">
               <a:buNone/>
             </a:pPr>
             <a:r>
@@ -7104,7 +7369,7 @@
           <a:bodyPr wrap="square" rtlCol="0" anchor="ctr"/>
           <a:lstStyle/>
           <a:p>
-            <a:pPr indent="0" marL="0">
+            <a:pPr marL="0" indent="0">
               <a:buNone/>
             </a:pPr>
             <a:r>
@@ -7141,6 +7406,13 @@
           </a:solidFill>
           <a:ln/>
         </p:spPr>
+        <p:txBody>
+          <a:bodyPr/>
+          <a:lstStyle/>
+          <a:p>
+            <a:endParaRPr lang="en-US"/>
+          </a:p>
+        </p:txBody>
       </p:sp>
       <p:sp>
         <p:nvSpPr>
@@ -7163,7 +7435,7 @@
           <a:bodyPr wrap="square" lIns="0" tIns="0" rIns="0" bIns="0" rtlCol="0" anchor="ctr"/>
           <a:lstStyle/>
           <a:p>
-            <a:pPr algn="ctr" indent="0" marL="0">
+            <a:pPr marL="0" indent="0" algn="ctr">
               <a:buNone/>
             </a:pPr>
             <a:r>
@@ -7199,7 +7471,7 @@
           <a:bodyPr wrap="square" rtlCol="0" anchor="ctr"/>
           <a:lstStyle/>
           <a:p>
-            <a:pPr indent="0" marL="0">
+            <a:pPr marL="0" indent="0">
               <a:buNone/>
             </a:pPr>
             <a:r>
@@ -7236,6 +7508,13 @@
           </a:solidFill>
           <a:ln/>
         </p:spPr>
+        <p:txBody>
+          <a:bodyPr/>
+          <a:lstStyle/>
+          <a:p>
+            <a:endParaRPr lang="en-US"/>
+          </a:p>
+        </p:txBody>
       </p:sp>
       <p:sp>
         <p:nvSpPr>
@@ -7258,7 +7537,7 @@
           <a:bodyPr wrap="square" lIns="0" tIns="0" rIns="0" bIns="0" rtlCol="0" anchor="ctr"/>
           <a:lstStyle/>
           <a:p>
-            <a:pPr algn="ctr" indent="0" marL="0">
+            <a:pPr marL="0" indent="0" algn="ctr">
               <a:buNone/>
             </a:pPr>
             <a:r>
@@ -7294,7 +7573,7 @@
           <a:bodyPr wrap="square" rtlCol="0" anchor="ctr"/>
           <a:lstStyle/>
           <a:p>
-            <a:pPr indent="0" marL="0">
+            <a:pPr marL="0" indent="0">
               <a:buNone/>
             </a:pPr>
             <a:r>
@@ -7331,6 +7610,13 @@
           </a:solidFill>
           <a:ln/>
         </p:spPr>
+        <p:txBody>
+          <a:bodyPr/>
+          <a:lstStyle/>
+          <a:p>
+            <a:endParaRPr lang="en-US"/>
+          </a:p>
+        </p:txBody>
       </p:sp>
       <p:sp>
         <p:nvSpPr>
@@ -7353,7 +7639,7 @@
           <a:bodyPr wrap="square" lIns="0" tIns="0" rIns="0" bIns="0" rtlCol="0" anchor="ctr"/>
           <a:lstStyle/>
           <a:p>
-            <a:pPr algn="ctr" indent="0" marL="0">
+            <a:pPr marL="0" indent="0" algn="ctr">
               <a:buNone/>
             </a:pPr>
             <a:r>
@@ -7389,7 +7675,7 @@
           <a:bodyPr wrap="square" rtlCol="0" anchor="ctr"/>
           <a:lstStyle/>
           <a:p>
-            <a:pPr indent="0" marL="0">
+            <a:pPr marL="0" indent="0">
               <a:buNone/>
             </a:pPr>
             <a:r>
@@ -7426,6 +7712,13 @@
           </a:solidFill>
           <a:ln/>
         </p:spPr>
+        <p:txBody>
+          <a:bodyPr/>
+          <a:lstStyle/>
+          <a:p>
+            <a:endParaRPr lang="en-US"/>
+          </a:p>
+        </p:txBody>
       </p:sp>
       <p:sp>
         <p:nvSpPr>
@@ -7448,7 +7741,7 @@
           <a:bodyPr wrap="square" lIns="0" tIns="0" rIns="0" bIns="0" rtlCol="0" anchor="ctr"/>
           <a:lstStyle/>
           <a:p>
-            <a:pPr algn="ctr" indent="0" marL="0">
+            <a:pPr marL="0" indent="0" algn="ctr">
               <a:buNone/>
             </a:pPr>
             <a:r>
@@ -7484,7 +7777,7 @@
           <a:bodyPr wrap="square" rtlCol="0" anchor="ctr"/>
           <a:lstStyle/>
           <a:p>
-            <a:pPr indent="0" marL="0">
+            <a:pPr marL="0" indent="0">
               <a:buNone/>
             </a:pPr>
             <a:r>
@@ -7521,6 +7814,13 @@
           </a:solidFill>
           <a:ln/>
         </p:spPr>
+        <p:txBody>
+          <a:bodyPr/>
+          <a:lstStyle/>
+          <a:p>
+            <a:endParaRPr lang="en-US"/>
+          </a:p>
+        </p:txBody>
       </p:sp>
       <p:sp>
         <p:nvSpPr>
@@ -7543,7 +7843,7 @@
           <a:bodyPr wrap="square" lIns="0" tIns="0" rIns="0" bIns="0" rtlCol="0" anchor="ctr"/>
           <a:lstStyle/>
           <a:p>
-            <a:pPr algn="ctr" indent="0" marL="0">
+            <a:pPr marL="0" indent="0" algn="ctr">
               <a:buNone/>
             </a:pPr>
             <a:r>
@@ -7579,7 +7879,7 @@
           <a:bodyPr wrap="square" rtlCol="0" anchor="ctr"/>
           <a:lstStyle/>
           <a:p>
-            <a:pPr indent="0" marL="0">
+            <a:pPr marL="0" indent="0">
               <a:buNone/>
             </a:pPr>
             <a:r>
@@ -7618,6 +7918,13 @@
           </a:solidFill>
           <a:ln/>
         </p:spPr>
+        <p:txBody>
+          <a:bodyPr/>
+          <a:lstStyle/>
+          <a:p>
+            <a:endParaRPr lang="en-US"/>
+          </a:p>
+        </p:txBody>
       </p:sp>
       <p:sp>
         <p:nvSpPr>
@@ -7640,7 +7947,7 @@
           <a:bodyPr wrap="square" lIns="0" tIns="0" rIns="0" bIns="0" rtlCol="0" anchor="ctr"/>
           <a:lstStyle/>
           <a:p>
-            <a:pPr indent="0" marL="0">
+            <a:pPr marL="0" indent="0">
               <a:buNone/>
             </a:pPr>
             <a:r>
@@ -7671,6 +7978,7 @@
         <a:solidFill>
           <a:srgbClr val="F6F8FA"/>
         </a:solidFill>
+        <a:effectLst/>
       </p:bgPr>
     </p:bg>
     <p:spTree>
@@ -7706,6 +8014,13 @@
           </a:solidFill>
           <a:ln/>
         </p:spPr>
+        <p:txBody>
+          <a:bodyPr/>
+          <a:lstStyle/>
+          <a:p>
+            <a:endParaRPr lang="en-US"/>
+          </a:p>
+        </p:txBody>
       </p:sp>
       <p:sp>
         <p:nvSpPr>
@@ -7728,11 +8043,11 @@
           <a:bodyPr wrap="square" lIns="0" tIns="0" rIns="0" bIns="0" rtlCol="0" anchor="ctr"/>
           <a:lstStyle/>
           <a:p>
-            <a:pPr indent="0" marL="0">
-              <a:buNone/>
-            </a:pPr>
-            <a:r>
-              <a:rPr lang="en-US" sz="1300" b="1" spc="300" kern="0" dirty="0">
+            <a:pPr marL="0" indent="0">
+              <a:buNone/>
+            </a:pPr>
+            <a:r>
+              <a:rPr lang="en-US" sz="1300" b="1" kern="0" spc="300" dirty="0">
                 <a:solidFill>
                   <a:srgbClr val="FFFFFF"/>
                 </a:solidFill>
@@ -7764,7 +8079,7 @@
           <a:bodyPr wrap="square" lIns="0" tIns="0" rIns="0" bIns="0" rtlCol="0" anchor="ctr"/>
           <a:lstStyle/>
           <a:p>
-            <a:pPr algn="r" indent="0" marL="0">
+            <a:pPr marL="0" indent="0" algn="r">
               <a:buNone/>
             </a:pPr>
             <a:r>
@@ -7803,13 +8118,20 @@
             <a:prstDash val="solid"/>
           </a:ln>
           <a:effectLst>
-            <a:outerShdw sx="100000" sy="100000" kx="0" ky="0" algn="bl" rotWithShape="0" blurRad="101600" dist="38100" dir="8100000">
+            <a:outerShdw blurRad="101600" dist="38100" dir="8100000" algn="bl" rotWithShape="0">
               <a:srgbClr val="000000">
                 <a:alpha val="18000"/>
               </a:srgbClr>
             </a:outerShdw>
           </a:effectLst>
         </p:spPr>
+        <p:txBody>
+          <a:bodyPr/>
+          <a:lstStyle/>
+          <a:p>
+            <a:endParaRPr lang="en-US"/>
+          </a:p>
+        </p:txBody>
       </p:sp>
       <p:sp>
         <p:nvSpPr>
@@ -7830,6 +8152,13 @@
           </a:solidFill>
           <a:ln/>
         </p:spPr>
+        <p:txBody>
+          <a:bodyPr/>
+          <a:lstStyle/>
+          <a:p>
+            <a:endParaRPr lang="en-US"/>
+          </a:p>
+        </p:txBody>
       </p:sp>
       <p:sp>
         <p:nvSpPr>
@@ -7852,7 +8181,7 @@
           <a:bodyPr wrap="square" lIns="0" tIns="0" rIns="0" bIns="0" rtlCol="0" anchor="ctr"/>
           <a:lstStyle/>
           <a:p>
-            <a:pPr indent="0" marL="0">
+            <a:pPr marL="0" indent="0">
               <a:buNone/>
             </a:pPr>
             <a:r>
@@ -7888,6 +8217,13 @@
           </a:solidFill>
           <a:ln/>
         </p:spPr>
+        <p:txBody>
+          <a:bodyPr/>
+          <a:lstStyle/>
+          <a:p>
+            <a:endParaRPr lang="en-US"/>
+          </a:p>
+        </p:txBody>
       </p:sp>
       <p:sp>
         <p:nvSpPr>
@@ -7910,7 +8246,7 @@
           <a:bodyPr wrap="square" lIns="0" tIns="0" rIns="0" bIns="0" rtlCol="0" anchor="ctr"/>
           <a:lstStyle/>
           <a:p>
-            <a:pPr algn="ctr" indent="0" marL="0">
+            <a:pPr marL="0" indent="0" algn="ctr">
               <a:buNone/>
             </a:pPr>
             <a:r>
@@ -7946,7 +8282,7 @@
           <a:bodyPr wrap="square" rtlCol="0" anchor="ctr"/>
           <a:lstStyle/>
           <a:p>
-            <a:pPr indent="0" marL="0">
+            <a:pPr marL="0" indent="0">
               <a:buNone/>
             </a:pPr>
             <a:r>
@@ -7988,6 +8324,13 @@
             <a:prstDash val="sysDot"/>
           </a:ln>
         </p:spPr>
+        <p:txBody>
+          <a:bodyPr/>
+          <a:lstStyle/>
+          <a:p>
+            <a:endParaRPr lang="en-US"/>
+          </a:p>
+        </p:txBody>
       </p:sp>
       <p:sp>
         <p:nvSpPr>
@@ -8010,6 +8353,13 @@
           </a:solidFill>
           <a:ln/>
         </p:spPr>
+        <p:txBody>
+          <a:bodyPr/>
+          <a:lstStyle/>
+          <a:p>
+            <a:endParaRPr lang="en-US"/>
+          </a:p>
+        </p:txBody>
       </p:sp>
       <p:sp>
         <p:nvSpPr>
@@ -8032,7 +8382,7 @@
           <a:bodyPr wrap="square" lIns="0" tIns="0" rIns="0" bIns="0" rtlCol="0" anchor="ctr"/>
           <a:lstStyle/>
           <a:p>
-            <a:pPr algn="ctr" indent="0" marL="0">
+            <a:pPr marL="0" indent="0" algn="ctr">
               <a:buNone/>
             </a:pPr>
             <a:r>
@@ -8068,7 +8418,7 @@
           <a:bodyPr wrap="square" rtlCol="0" anchor="ctr"/>
           <a:lstStyle/>
           <a:p>
-            <a:pPr indent="0" marL="0">
+            <a:pPr marL="0" indent="0">
               <a:buNone/>
             </a:pPr>
             <a:r>
@@ -8110,6 +8460,13 @@
             <a:prstDash val="sysDot"/>
           </a:ln>
         </p:spPr>
+        <p:txBody>
+          <a:bodyPr/>
+          <a:lstStyle/>
+          <a:p>
+            <a:endParaRPr lang="en-US"/>
+          </a:p>
+        </p:txBody>
       </p:sp>
       <p:sp>
         <p:nvSpPr>
@@ -8132,6 +8489,13 @@
           </a:solidFill>
           <a:ln/>
         </p:spPr>
+        <p:txBody>
+          <a:bodyPr/>
+          <a:lstStyle/>
+          <a:p>
+            <a:endParaRPr lang="en-US"/>
+          </a:p>
+        </p:txBody>
       </p:sp>
       <p:sp>
         <p:nvSpPr>
@@ -8154,7 +8518,7 @@
           <a:bodyPr wrap="square" lIns="0" tIns="0" rIns="0" bIns="0" rtlCol="0" anchor="ctr"/>
           <a:lstStyle/>
           <a:p>
-            <a:pPr algn="ctr" indent="0" marL="0">
+            <a:pPr marL="0" indent="0" algn="ctr">
               <a:buNone/>
             </a:pPr>
             <a:r>
@@ -8190,7 +8554,7 @@
           <a:bodyPr wrap="square" rtlCol="0" anchor="ctr"/>
           <a:lstStyle/>
           <a:p>
-            <a:pPr indent="0" marL="0">
+            <a:pPr marL="0" indent="0">
               <a:buNone/>
             </a:pPr>
             <a:r>
@@ -8232,6 +8596,13 @@
             <a:prstDash val="sysDot"/>
           </a:ln>
         </p:spPr>
+        <p:txBody>
+          <a:bodyPr/>
+          <a:lstStyle/>
+          <a:p>
+            <a:endParaRPr lang="en-US"/>
+          </a:p>
+        </p:txBody>
       </p:sp>
       <p:sp>
         <p:nvSpPr>
@@ -8254,6 +8625,13 @@
           </a:solidFill>
           <a:ln/>
         </p:spPr>
+        <p:txBody>
+          <a:bodyPr/>
+          <a:lstStyle/>
+          <a:p>
+            <a:endParaRPr lang="en-US"/>
+          </a:p>
+        </p:txBody>
       </p:sp>
       <p:sp>
         <p:nvSpPr>
@@ -8276,7 +8654,7 @@
           <a:bodyPr wrap="square" lIns="0" tIns="0" rIns="0" bIns="0" rtlCol="0" anchor="ctr"/>
           <a:lstStyle/>
           <a:p>
-            <a:pPr algn="ctr" indent="0" marL="0">
+            <a:pPr marL="0" indent="0" algn="ctr">
               <a:buNone/>
             </a:pPr>
             <a:r>
@@ -8312,7 +8690,7 @@
           <a:bodyPr wrap="square" rtlCol="0" anchor="ctr"/>
           <a:lstStyle/>
           <a:p>
-            <a:pPr indent="0" marL="0">
+            <a:pPr marL="0" indent="0">
               <a:buNone/>
             </a:pPr>
             <a:r>
@@ -8354,6 +8732,13 @@
             <a:prstDash val="sysDot"/>
           </a:ln>
         </p:spPr>
+        <p:txBody>
+          <a:bodyPr/>
+          <a:lstStyle/>
+          <a:p>
+            <a:endParaRPr lang="en-US"/>
+          </a:p>
+        </p:txBody>
       </p:sp>
       <p:sp>
         <p:nvSpPr>
@@ -8376,6 +8761,13 @@
           </a:solidFill>
           <a:ln/>
         </p:spPr>
+        <p:txBody>
+          <a:bodyPr/>
+          <a:lstStyle/>
+          <a:p>
+            <a:endParaRPr lang="en-US"/>
+          </a:p>
+        </p:txBody>
       </p:sp>
       <p:sp>
         <p:nvSpPr>
@@ -8398,7 +8790,7 @@
           <a:bodyPr wrap="square" lIns="0" tIns="0" rIns="0" bIns="0" rtlCol="0" anchor="ctr"/>
           <a:lstStyle/>
           <a:p>
-            <a:pPr algn="ctr" indent="0" marL="0">
+            <a:pPr marL="0" indent="0" algn="ctr">
               <a:buNone/>
             </a:pPr>
             <a:r>
@@ -8434,7 +8826,7 @@
           <a:bodyPr wrap="square" rtlCol="0" anchor="ctr"/>
           <a:lstStyle/>
           <a:p>
-            <a:pPr indent="0" marL="0">
+            <a:pPr marL="0" indent="0">
               <a:buNone/>
             </a:pPr>
             <a:r>
@@ -8476,13 +8868,20 @@
             <a:prstDash val="solid"/>
           </a:ln>
           <a:effectLst>
-            <a:outerShdw sx="100000" sy="100000" kx="0" ky="0" algn="bl" rotWithShape="0" blurRad="101600" dist="38100" dir="8100000">
+            <a:outerShdw blurRad="101600" dist="38100" dir="8100000" algn="bl" rotWithShape="0">
               <a:srgbClr val="000000">
                 <a:alpha val="18000"/>
               </a:srgbClr>
             </a:outerShdw>
           </a:effectLst>
         </p:spPr>
+        <p:txBody>
+          <a:bodyPr/>
+          <a:lstStyle/>
+          <a:p>
+            <a:endParaRPr lang="en-US"/>
+          </a:p>
+        </p:txBody>
       </p:sp>
       <p:sp>
         <p:nvSpPr>
@@ -8503,6 +8902,13 @@
           </a:solidFill>
           <a:ln/>
         </p:spPr>
+        <p:txBody>
+          <a:bodyPr/>
+          <a:lstStyle/>
+          <a:p>
+            <a:endParaRPr lang="en-US"/>
+          </a:p>
+        </p:txBody>
       </p:sp>
       <p:sp>
         <p:nvSpPr>
@@ -8525,7 +8931,7 @@
           <a:bodyPr wrap="square" lIns="0" tIns="0" rIns="0" bIns="0" rtlCol="0" anchor="ctr"/>
           <a:lstStyle/>
           <a:p>
-            <a:pPr indent="0" marL="0">
+            <a:pPr marL="0" indent="0">
               <a:buNone/>
             </a:pPr>
             <a:r>
@@ -8561,6 +8967,13 @@
           </a:solidFill>
           <a:ln/>
         </p:spPr>
+        <p:txBody>
+          <a:bodyPr/>
+          <a:lstStyle/>
+          <a:p>
+            <a:endParaRPr lang="en-US"/>
+          </a:p>
+        </p:txBody>
       </p:sp>
       <p:sp>
         <p:nvSpPr>
@@ -8583,7 +8996,7 @@
           <a:bodyPr wrap="square" lIns="0" tIns="0" rIns="0" bIns="0" rtlCol="0" anchor="ctr"/>
           <a:lstStyle/>
           <a:p>
-            <a:pPr algn="ctr" indent="0" marL="0">
+            <a:pPr marL="0" indent="0" algn="ctr">
               <a:buNone/>
             </a:pPr>
             <a:r>
@@ -8619,7 +9032,7 @@
           <a:bodyPr wrap="square" rtlCol="0" anchor="ctr"/>
           <a:lstStyle/>
           <a:p>
-            <a:pPr indent="0" marL="0">
+            <a:pPr marL="0" indent="0">
               <a:buNone/>
             </a:pPr>
             <a:r>
@@ -8661,6 +9074,13 @@
             <a:prstDash val="sysDot"/>
           </a:ln>
         </p:spPr>
+        <p:txBody>
+          <a:bodyPr/>
+          <a:lstStyle/>
+          <a:p>
+            <a:endParaRPr lang="en-US"/>
+          </a:p>
+        </p:txBody>
       </p:sp>
       <p:sp>
         <p:nvSpPr>
@@ -8683,6 +9103,13 @@
           </a:solidFill>
           <a:ln/>
         </p:spPr>
+        <p:txBody>
+          <a:bodyPr/>
+          <a:lstStyle/>
+          <a:p>
+            <a:endParaRPr lang="en-US"/>
+          </a:p>
+        </p:txBody>
       </p:sp>
       <p:sp>
         <p:nvSpPr>
@@ -8705,7 +9132,7 @@
           <a:bodyPr wrap="square" lIns="0" tIns="0" rIns="0" bIns="0" rtlCol="0" anchor="ctr"/>
           <a:lstStyle/>
           <a:p>
-            <a:pPr algn="ctr" indent="0" marL="0">
+            <a:pPr marL="0" indent="0" algn="ctr">
               <a:buNone/>
             </a:pPr>
             <a:r>
@@ -8741,7 +9168,7 @@
           <a:bodyPr wrap="square" rtlCol="0" anchor="ctr"/>
           <a:lstStyle/>
           <a:p>
-            <a:pPr indent="0" marL="0">
+            <a:pPr marL="0" indent="0">
               <a:buNone/>
             </a:pPr>
             <a:r>
@@ -8783,6 +9210,13 @@
             <a:prstDash val="sysDot"/>
           </a:ln>
         </p:spPr>
+        <p:txBody>
+          <a:bodyPr/>
+          <a:lstStyle/>
+          <a:p>
+            <a:endParaRPr lang="en-US"/>
+          </a:p>
+        </p:txBody>
       </p:sp>
       <p:sp>
         <p:nvSpPr>
@@ -8805,6 +9239,13 @@
           </a:solidFill>
           <a:ln/>
         </p:spPr>
+        <p:txBody>
+          <a:bodyPr/>
+          <a:lstStyle/>
+          <a:p>
+            <a:endParaRPr lang="en-US"/>
+          </a:p>
+        </p:txBody>
       </p:sp>
       <p:sp>
         <p:nvSpPr>
@@ -8827,7 +9268,7 @@
           <a:bodyPr wrap="square" lIns="0" tIns="0" rIns="0" bIns="0" rtlCol="0" anchor="ctr"/>
           <a:lstStyle/>
           <a:p>
-            <a:pPr algn="ctr" indent="0" marL="0">
+            <a:pPr marL="0" indent="0" algn="ctr">
               <a:buNone/>
             </a:pPr>
             <a:r>
@@ -8863,7 +9304,7 @@
           <a:bodyPr wrap="square" rtlCol="0" anchor="ctr"/>
           <a:lstStyle/>
           <a:p>
-            <a:pPr indent="0" marL="0">
+            <a:pPr marL="0" indent="0">
               <a:buNone/>
             </a:pPr>
             <a:r>
@@ -8905,6 +9346,13 @@
             <a:prstDash val="sysDot"/>
           </a:ln>
         </p:spPr>
+        <p:txBody>
+          <a:bodyPr/>
+          <a:lstStyle/>
+          <a:p>
+            <a:endParaRPr lang="en-US"/>
+          </a:p>
+        </p:txBody>
       </p:sp>
       <p:sp>
         <p:nvSpPr>
@@ -8927,6 +9375,13 @@
           </a:solidFill>
           <a:ln/>
         </p:spPr>
+        <p:txBody>
+          <a:bodyPr/>
+          <a:lstStyle/>
+          <a:p>
+            <a:endParaRPr lang="en-US"/>
+          </a:p>
+        </p:txBody>
       </p:sp>
       <p:sp>
         <p:nvSpPr>
@@ -8949,7 +9404,7 @@
           <a:bodyPr wrap="square" lIns="0" tIns="0" rIns="0" bIns="0" rtlCol="0" anchor="ctr"/>
           <a:lstStyle/>
           <a:p>
-            <a:pPr algn="ctr" indent="0" marL="0">
+            <a:pPr marL="0" indent="0" algn="ctr">
               <a:buNone/>
             </a:pPr>
             <a:r>
@@ -8985,7 +9440,7 @@
           <a:bodyPr wrap="square" rtlCol="0" anchor="ctr"/>
           <a:lstStyle/>
           <a:p>
-            <a:pPr indent="0" marL="0">
+            <a:pPr marL="0" indent="0">
               <a:buNone/>
             </a:pPr>
             <a:r>
@@ -9027,6 +9482,13 @@
             <a:prstDash val="sysDot"/>
           </a:ln>
         </p:spPr>
+        <p:txBody>
+          <a:bodyPr/>
+          <a:lstStyle/>
+          <a:p>
+            <a:endParaRPr lang="en-US"/>
+          </a:p>
+        </p:txBody>
       </p:sp>
       <p:sp>
         <p:nvSpPr>
@@ -9049,6 +9511,13 @@
           </a:solidFill>
           <a:ln/>
         </p:spPr>
+        <p:txBody>
+          <a:bodyPr/>
+          <a:lstStyle/>
+          <a:p>
+            <a:endParaRPr lang="en-US"/>
+          </a:p>
+        </p:txBody>
       </p:sp>
       <p:sp>
         <p:nvSpPr>
@@ -9071,7 +9540,7 @@
           <a:bodyPr wrap="square" lIns="0" tIns="0" rIns="0" bIns="0" rtlCol="0" anchor="ctr"/>
           <a:lstStyle/>
           <a:p>
-            <a:pPr algn="ctr" indent="0" marL="0">
+            <a:pPr marL="0" indent="0" algn="ctr">
               <a:buNone/>
             </a:pPr>
             <a:r>
@@ -9107,7 +9576,7 @@
           <a:bodyPr wrap="square" rtlCol="0" anchor="ctr"/>
           <a:lstStyle/>
           <a:p>
-            <a:pPr indent="0" marL="0">
+            <a:pPr marL="0" indent="0">
               <a:buNone/>
             </a:pPr>
             <a:r>
@@ -9149,13 +9618,20 @@
             <a:prstDash val="solid"/>
           </a:ln>
           <a:effectLst>
-            <a:outerShdw sx="100000" sy="100000" kx="0" ky="0" algn="bl" rotWithShape="0" blurRad="101600" dist="38100" dir="8100000">
+            <a:outerShdw blurRad="101600" dist="38100" dir="8100000" algn="bl" rotWithShape="0">
               <a:srgbClr val="000000">
                 <a:alpha val="18000"/>
               </a:srgbClr>
             </a:outerShdw>
           </a:effectLst>
         </p:spPr>
+        <p:txBody>
+          <a:bodyPr/>
+          <a:lstStyle/>
+          <a:p>
+            <a:endParaRPr lang="en-US"/>
+          </a:p>
+        </p:txBody>
       </p:sp>
       <p:sp>
         <p:nvSpPr>
@@ -9176,6 +9652,13 @@
           </a:solidFill>
           <a:ln/>
         </p:spPr>
+        <p:txBody>
+          <a:bodyPr/>
+          <a:lstStyle/>
+          <a:p>
+            <a:endParaRPr lang="en-US"/>
+          </a:p>
+        </p:txBody>
       </p:sp>
       <p:sp>
         <p:nvSpPr>
@@ -9198,7 +9681,7 @@
           <a:bodyPr wrap="square" lIns="0" tIns="0" rIns="0" bIns="0" rtlCol="0" anchor="ctr"/>
           <a:lstStyle/>
           <a:p>
-            <a:pPr indent="0" marL="0">
+            <a:pPr marL="0" indent="0">
               <a:buNone/>
             </a:pPr>
             <a:r>
@@ -9234,6 +9717,13 @@
           </a:solidFill>
           <a:ln/>
         </p:spPr>
+        <p:txBody>
+          <a:bodyPr/>
+          <a:lstStyle/>
+          <a:p>
+            <a:endParaRPr lang="en-US"/>
+          </a:p>
+        </p:txBody>
       </p:sp>
       <p:sp>
         <p:nvSpPr>
@@ -9256,7 +9746,7 @@
           <a:bodyPr wrap="square" lIns="0" tIns="0" rIns="0" bIns="0" rtlCol="0" anchor="ctr"/>
           <a:lstStyle/>
           <a:p>
-            <a:pPr algn="ctr" indent="0" marL="0">
+            <a:pPr marL="0" indent="0" algn="ctr">
               <a:buNone/>
             </a:pPr>
             <a:r>
@@ -9292,7 +9782,7 @@
           <a:bodyPr wrap="square" rtlCol="0" anchor="ctr"/>
           <a:lstStyle/>
           <a:p>
-            <a:pPr indent="0" marL="0">
+            <a:pPr marL="0" indent="0">
               <a:buNone/>
             </a:pPr>
             <a:r>
@@ -9334,6 +9824,13 @@
             <a:prstDash val="sysDot"/>
           </a:ln>
         </p:spPr>
+        <p:txBody>
+          <a:bodyPr/>
+          <a:lstStyle/>
+          <a:p>
+            <a:endParaRPr lang="en-US"/>
+          </a:p>
+        </p:txBody>
       </p:sp>
       <p:sp>
         <p:nvSpPr>
@@ -9356,6 +9853,13 @@
           </a:solidFill>
           <a:ln/>
         </p:spPr>
+        <p:txBody>
+          <a:bodyPr/>
+          <a:lstStyle/>
+          <a:p>
+            <a:endParaRPr lang="en-US"/>
+          </a:p>
+        </p:txBody>
       </p:sp>
       <p:sp>
         <p:nvSpPr>
@@ -9378,7 +9882,7 @@
           <a:bodyPr wrap="square" lIns="0" tIns="0" rIns="0" bIns="0" rtlCol="0" anchor="ctr"/>
           <a:lstStyle/>
           <a:p>
-            <a:pPr algn="ctr" indent="0" marL="0">
+            <a:pPr marL="0" indent="0" algn="ctr">
               <a:buNone/>
             </a:pPr>
             <a:r>
@@ -9414,7 +9918,7 @@
           <a:bodyPr wrap="square" rtlCol="0" anchor="ctr"/>
           <a:lstStyle/>
           <a:p>
-            <a:pPr indent="0" marL="0">
+            <a:pPr marL="0" indent="0">
               <a:buNone/>
             </a:pPr>
             <a:r>
@@ -9456,6 +9960,13 @@
             <a:prstDash val="sysDot"/>
           </a:ln>
         </p:spPr>
+        <p:txBody>
+          <a:bodyPr/>
+          <a:lstStyle/>
+          <a:p>
+            <a:endParaRPr lang="en-US"/>
+          </a:p>
+        </p:txBody>
       </p:sp>
       <p:sp>
         <p:nvSpPr>
@@ -9478,6 +9989,13 @@
           </a:solidFill>
           <a:ln/>
         </p:spPr>
+        <p:txBody>
+          <a:bodyPr/>
+          <a:lstStyle/>
+          <a:p>
+            <a:endParaRPr lang="en-US"/>
+          </a:p>
+        </p:txBody>
       </p:sp>
       <p:sp>
         <p:nvSpPr>
@@ -9500,7 +10018,7 @@
           <a:bodyPr wrap="square" lIns="0" tIns="0" rIns="0" bIns="0" rtlCol="0" anchor="ctr"/>
           <a:lstStyle/>
           <a:p>
-            <a:pPr algn="ctr" indent="0" marL="0">
+            <a:pPr marL="0" indent="0" algn="ctr">
               <a:buNone/>
             </a:pPr>
             <a:r>
@@ -9536,7 +10054,7 @@
           <a:bodyPr wrap="square" rtlCol="0" anchor="ctr"/>
           <a:lstStyle/>
           <a:p>
-            <a:pPr indent="0" marL="0">
+            <a:pPr marL="0" indent="0">
               <a:buNone/>
             </a:pPr>
             <a:r>
@@ -9578,6 +10096,13 @@
             <a:prstDash val="sysDot"/>
           </a:ln>
         </p:spPr>
+        <p:txBody>
+          <a:bodyPr/>
+          <a:lstStyle/>
+          <a:p>
+            <a:endParaRPr lang="en-US"/>
+          </a:p>
+        </p:txBody>
       </p:sp>
       <p:sp>
         <p:nvSpPr>
@@ -9600,6 +10125,13 @@
           </a:solidFill>
           <a:ln/>
         </p:spPr>
+        <p:txBody>
+          <a:bodyPr/>
+          <a:lstStyle/>
+          <a:p>
+            <a:endParaRPr lang="en-US"/>
+          </a:p>
+        </p:txBody>
       </p:sp>
       <p:sp>
         <p:nvSpPr>
@@ -9622,7 +10154,7 @@
           <a:bodyPr wrap="square" lIns="0" tIns="0" rIns="0" bIns="0" rtlCol="0" anchor="ctr"/>
           <a:lstStyle/>
           <a:p>
-            <a:pPr algn="ctr" indent="0" marL="0">
+            <a:pPr marL="0" indent="0" algn="ctr">
               <a:buNone/>
             </a:pPr>
             <a:r>
@@ -9658,7 +10190,7 @@
           <a:bodyPr wrap="square" rtlCol="0" anchor="ctr"/>
           <a:lstStyle/>
           <a:p>
-            <a:pPr indent="0" marL="0">
+            <a:pPr marL="0" indent="0">
               <a:buNone/>
             </a:pPr>
             <a:r>
@@ -9700,6 +10232,13 @@
             <a:prstDash val="sysDot"/>
           </a:ln>
         </p:spPr>
+        <p:txBody>
+          <a:bodyPr/>
+          <a:lstStyle/>
+          <a:p>
+            <a:endParaRPr lang="en-US"/>
+          </a:p>
+        </p:txBody>
       </p:sp>
       <p:sp>
         <p:nvSpPr>
@@ -9722,6 +10261,13 @@
           </a:solidFill>
           <a:ln/>
         </p:spPr>
+        <p:txBody>
+          <a:bodyPr/>
+          <a:lstStyle/>
+          <a:p>
+            <a:endParaRPr lang="en-US"/>
+          </a:p>
+        </p:txBody>
       </p:sp>
       <p:sp>
         <p:nvSpPr>
@@ -9744,7 +10290,7 @@
           <a:bodyPr wrap="square" lIns="0" tIns="0" rIns="0" bIns="0" rtlCol="0" anchor="ctr"/>
           <a:lstStyle/>
           <a:p>
-            <a:pPr algn="ctr" indent="0" marL="0">
+            <a:pPr marL="0" indent="0" algn="ctr">
               <a:buNone/>
             </a:pPr>
             <a:r>
@@ -9780,7 +10326,7 @@
           <a:bodyPr wrap="square" rtlCol="0" anchor="ctr"/>
           <a:lstStyle/>
           <a:p>
-            <a:pPr indent="0" marL="0">
+            <a:pPr marL="0" indent="0">
               <a:buNone/>
             </a:pPr>
             <a:r>
@@ -9814,6 +10360,7 @@
         <a:solidFill>
           <a:srgbClr val="0D1117"/>
         </a:solidFill>
+        <a:effectLst/>
       </p:bgPr>
     </p:bg>
     <p:spTree>
@@ -9849,6 +10396,13 @@
           </a:solidFill>
           <a:ln/>
         </p:spPr>
+        <p:txBody>
+          <a:bodyPr/>
+          <a:lstStyle/>
+          <a:p>
+            <a:endParaRPr lang="en-US"/>
+          </a:p>
+        </p:txBody>
       </p:sp>
       <p:sp>
         <p:nvSpPr>
@@ -9871,11 +10425,11 @@
           <a:bodyPr wrap="square" lIns="0" tIns="0" rIns="0" bIns="0" rtlCol="0" anchor="ctr"/>
           <a:lstStyle/>
           <a:p>
-            <a:pPr indent="0" marL="0">
-              <a:buNone/>
-            </a:pPr>
-            <a:r>
-              <a:rPr lang="en-US" sz="1300" b="1" spc="300" kern="0" dirty="0">
+            <a:pPr marL="0" indent="0">
+              <a:buNone/>
+            </a:pPr>
+            <a:r>
+              <a:rPr lang="en-US" sz="1300" b="1" kern="0" spc="300" dirty="0">
                 <a:solidFill>
                   <a:srgbClr val="FFFFFF"/>
                 </a:solidFill>
@@ -9907,7 +10461,7 @@
           <a:bodyPr wrap="square" rtlCol="0" anchor="ctr"/>
           <a:lstStyle/>
           <a:p>
-            <a:pPr indent="0" marL="0">
+            <a:pPr marL="0" indent="0">
               <a:buNone/>
             </a:pPr>
             <a:r>
@@ -9951,6 +10505,13 @@
             <a:prstDash val="solid"/>
           </a:ln>
         </p:spPr>
+        <p:txBody>
+          <a:bodyPr/>
+          <a:lstStyle/>
+          <a:p>
+            <a:endParaRPr lang="en-US"/>
+          </a:p>
+        </p:txBody>
       </p:sp>
       <p:sp>
         <p:nvSpPr>
@@ -9973,7 +10534,7 @@
           <a:bodyPr wrap="square" rtlCol="0" anchor="ctr"/>
           <a:lstStyle/>
           <a:p>
-            <a:pPr algn="ctr" indent="0" marL="0">
+            <a:pPr marL="0" indent="0" algn="ctr">
               <a:buNone/>
             </a:pPr>
             <a:r>
@@ -10009,7 +10570,7 @@
           <a:bodyPr wrap="square" rtlCol="0" anchor="ctr"/>
           <a:lstStyle/>
           <a:p>
-            <a:pPr indent="0" marL="0">
+            <a:pPr marL="0" indent="0">
               <a:buNone/>
             </a:pPr>
             <a:r>
@@ -10053,6 +10614,13 @@
             <a:prstDash val="solid"/>
           </a:ln>
         </p:spPr>
+        <p:txBody>
+          <a:bodyPr/>
+          <a:lstStyle/>
+          <a:p>
+            <a:endParaRPr lang="en-US"/>
+          </a:p>
+        </p:txBody>
       </p:sp>
       <p:sp>
         <p:nvSpPr>
@@ -10075,7 +10643,7 @@
           <a:bodyPr wrap="square" rtlCol="0" anchor="ctr"/>
           <a:lstStyle/>
           <a:p>
-            <a:pPr algn="ctr" indent="0" marL="0">
+            <a:pPr marL="0" indent="0" algn="ctr">
               <a:buNone/>
             </a:pPr>
             <a:r>
@@ -10111,7 +10679,7 @@
           <a:bodyPr wrap="square" rtlCol="0" anchor="ctr"/>
           <a:lstStyle/>
           <a:p>
-            <a:pPr indent="0" marL="0">
+            <a:pPr marL="0" indent="0">
               <a:buNone/>
             </a:pPr>
             <a:r>
@@ -10155,6 +10723,13 @@
             <a:prstDash val="solid"/>
           </a:ln>
         </p:spPr>
+        <p:txBody>
+          <a:bodyPr/>
+          <a:lstStyle/>
+          <a:p>
+            <a:endParaRPr lang="en-US"/>
+          </a:p>
+        </p:txBody>
       </p:sp>
       <p:sp>
         <p:nvSpPr>
@@ -10177,7 +10752,7 @@
           <a:bodyPr wrap="square" rtlCol="0" anchor="ctr"/>
           <a:lstStyle/>
           <a:p>
-            <a:pPr algn="ctr" indent="0" marL="0">
+            <a:pPr marL="0" indent="0" algn="ctr">
               <a:buNone/>
             </a:pPr>
             <a:r>
@@ -10213,7 +10788,7 @@
           <a:bodyPr wrap="square" rtlCol="0" anchor="ctr"/>
           <a:lstStyle/>
           <a:p>
-            <a:pPr indent="0" marL="0">
+            <a:pPr marL="0" indent="0">
               <a:buNone/>
             </a:pPr>
             <a:r>
@@ -10257,6 +10832,13 @@
             <a:prstDash val="solid"/>
           </a:ln>
         </p:spPr>
+        <p:txBody>
+          <a:bodyPr/>
+          <a:lstStyle/>
+          <a:p>
+            <a:endParaRPr lang="en-US"/>
+          </a:p>
+        </p:txBody>
       </p:sp>
       <p:sp>
         <p:nvSpPr>
@@ -10279,7 +10861,7 @@
           <a:bodyPr wrap="square" rtlCol="0" anchor="ctr"/>
           <a:lstStyle/>
           <a:p>
-            <a:pPr algn="ctr" indent="0" marL="0">
+            <a:pPr marL="0" indent="0" algn="ctr">
               <a:buNone/>
             </a:pPr>
             <a:r>
@@ -10315,7 +10897,7 @@
           <a:bodyPr wrap="square" rtlCol="0" anchor="ctr"/>
           <a:lstStyle/>
           <a:p>
-            <a:pPr indent="0" marL="0">
+            <a:pPr marL="0" indent="0">
               <a:buNone/>
             </a:pPr>
             <a:r>
@@ -10359,6 +10941,13 @@
             <a:prstDash val="solid"/>
           </a:ln>
         </p:spPr>
+        <p:txBody>
+          <a:bodyPr/>
+          <a:lstStyle/>
+          <a:p>
+            <a:endParaRPr lang="en-US"/>
+          </a:p>
+        </p:txBody>
       </p:sp>
       <p:sp>
         <p:nvSpPr>
@@ -10381,7 +10970,7 @@
           <a:bodyPr wrap="square" rtlCol="0" anchor="ctr"/>
           <a:lstStyle/>
           <a:p>
-            <a:pPr algn="ctr" indent="0" marL="0">
+            <a:pPr marL="0" indent="0" algn="ctr">
               <a:buNone/>
             </a:pPr>
             <a:r>
@@ -10417,7 +11006,7 @@
           <a:bodyPr wrap="square" rtlCol="0" anchor="ctr"/>
           <a:lstStyle/>
           <a:p>
-            <a:pPr indent="0" marL="0">
+            <a:pPr marL="0" indent="0">
               <a:buNone/>
             </a:pPr>
             <a:r>
@@ -10457,6 +11046,13 @@
             <a:prstDash val="solid"/>
           </a:ln>
         </p:spPr>
+        <p:txBody>
+          <a:bodyPr/>
+          <a:lstStyle/>
+          <a:p>
+            <a:endParaRPr lang="en-US"/>
+          </a:p>
+        </p:txBody>
       </p:sp>
       <p:sp>
         <p:nvSpPr>
@@ -10479,7 +11075,7 @@
           <a:bodyPr wrap="square" rtlCol="0" anchor="ctr"/>
           <a:lstStyle/>
           <a:p>
-            <a:pPr indent="0" marL="0">
+            <a:pPr marL="0" indent="0">
               <a:buNone/>
             </a:pPr>
             <a:r>
@@ -10521,6 +11117,13 @@
             <a:prstDash val="solid"/>
           </a:ln>
         </p:spPr>
+        <p:txBody>
+          <a:bodyPr/>
+          <a:lstStyle/>
+          <a:p>
+            <a:endParaRPr lang="en-US"/>
+          </a:p>
+        </p:txBody>
       </p:sp>
       <p:sp>
         <p:nvSpPr>
@@ -10541,6 +11144,13 @@
           </a:solidFill>
           <a:ln/>
         </p:spPr>
+        <p:txBody>
+          <a:bodyPr/>
+          <a:lstStyle/>
+          <a:p>
+            <a:endParaRPr lang="en-US"/>
+          </a:p>
+        </p:txBody>
       </p:sp>
       <p:sp>
         <p:nvSpPr>
@@ -10563,7 +11173,7 @@
           <a:bodyPr wrap="square" rtlCol="0" anchor="ctr"/>
           <a:lstStyle/>
           <a:p>
-            <a:pPr indent="0" marL="0">
+            <a:pPr marL="0" indent="0">
               <a:buNone/>
             </a:pPr>
             <a:r>
@@ -10602,7 +11212,7 @@
           <a:bodyPr wrap="square" rtlCol="0" anchor="ctr"/>
           <a:lstStyle/>
           <a:p>
-            <a:pPr algn="r" indent="0" marL="0">
+            <a:pPr marL="0" indent="0" algn="r">
               <a:buNone/>
             </a:pPr>
             <a:r>
@@ -10641,6 +11251,13 @@
             <a:prstDash val="solid"/>
           </a:ln>
         </p:spPr>
+        <p:txBody>
+          <a:bodyPr/>
+          <a:lstStyle/>
+          <a:p>
+            <a:endParaRPr lang="en-US"/>
+          </a:p>
+        </p:txBody>
       </p:sp>
       <p:sp>
         <p:nvSpPr>
@@ -10661,6 +11278,13 @@
           </a:solidFill>
           <a:ln/>
         </p:spPr>
+        <p:txBody>
+          <a:bodyPr/>
+          <a:lstStyle/>
+          <a:p>
+            <a:endParaRPr lang="en-US"/>
+          </a:p>
+        </p:txBody>
       </p:sp>
       <p:sp>
         <p:nvSpPr>
@@ -10683,7 +11307,7 @@
           <a:bodyPr wrap="square" rtlCol="0" anchor="ctr"/>
           <a:lstStyle/>
           <a:p>
-            <a:pPr indent="0" marL="0">
+            <a:pPr marL="0" indent="0">
               <a:buNone/>
             </a:pPr>
             <a:r>
@@ -10722,7 +11346,7 @@
           <a:bodyPr wrap="square" rtlCol="0" anchor="ctr"/>
           <a:lstStyle/>
           <a:p>
-            <a:pPr algn="r" indent="0" marL="0">
+            <a:pPr marL="0" indent="0" algn="r">
               <a:buNone/>
             </a:pPr>
             <a:r>
@@ -10761,6 +11385,13 @@
             <a:prstDash val="solid"/>
           </a:ln>
         </p:spPr>
+        <p:txBody>
+          <a:bodyPr/>
+          <a:lstStyle/>
+          <a:p>
+            <a:endParaRPr lang="en-US"/>
+          </a:p>
+        </p:txBody>
       </p:sp>
       <p:sp>
         <p:nvSpPr>
@@ -10781,6 +11412,13 @@
           </a:solidFill>
           <a:ln/>
         </p:spPr>
+        <p:txBody>
+          <a:bodyPr/>
+          <a:lstStyle/>
+          <a:p>
+            <a:endParaRPr lang="en-US"/>
+          </a:p>
+        </p:txBody>
       </p:sp>
       <p:sp>
         <p:nvSpPr>
@@ -10803,7 +11441,7 @@
           <a:bodyPr wrap="square" rtlCol="0" anchor="ctr"/>
           <a:lstStyle/>
           <a:p>
-            <a:pPr indent="0" marL="0">
+            <a:pPr marL="0" indent="0">
               <a:buNone/>
             </a:pPr>
             <a:r>
@@ -10842,7 +11480,7 @@
           <a:bodyPr wrap="square" rtlCol="0" anchor="ctr"/>
           <a:lstStyle/>
           <a:p>
-            <a:pPr algn="r" indent="0" marL="0">
+            <a:pPr marL="0" indent="0" algn="r">
               <a:buNone/>
             </a:pPr>
             <a:r>
@@ -10881,6 +11519,13 @@
             <a:prstDash val="solid"/>
           </a:ln>
         </p:spPr>
+        <p:txBody>
+          <a:bodyPr/>
+          <a:lstStyle/>
+          <a:p>
+            <a:endParaRPr lang="en-US"/>
+          </a:p>
+        </p:txBody>
       </p:sp>
       <p:sp>
         <p:nvSpPr>
@@ -10901,6 +11546,13 @@
           </a:solidFill>
           <a:ln/>
         </p:spPr>
+        <p:txBody>
+          <a:bodyPr/>
+          <a:lstStyle/>
+          <a:p>
+            <a:endParaRPr lang="en-US"/>
+          </a:p>
+        </p:txBody>
       </p:sp>
       <p:sp>
         <p:nvSpPr>
@@ -10923,7 +11575,7 @@
           <a:bodyPr wrap="square" rtlCol="0" anchor="ctr"/>
           <a:lstStyle/>
           <a:p>
-            <a:pPr indent="0" marL="0">
+            <a:pPr marL="0" indent="0">
               <a:buNone/>
             </a:pPr>
             <a:r>
@@ -10962,7 +11614,7 @@
           <a:bodyPr wrap="square" rtlCol="0" anchor="ctr"/>
           <a:lstStyle/>
           <a:p>
-            <a:pPr algn="r" indent="0" marL="0">
+            <a:pPr marL="0" indent="0" algn="r">
               <a:buNone/>
             </a:pPr>
             <a:r>
@@ -11001,6 +11653,13 @@
             <a:prstDash val="solid"/>
           </a:ln>
         </p:spPr>
+        <p:txBody>
+          <a:bodyPr/>
+          <a:lstStyle/>
+          <a:p>
+            <a:endParaRPr lang="en-US"/>
+          </a:p>
+        </p:txBody>
       </p:sp>
       <p:sp>
         <p:nvSpPr>
@@ -11021,6 +11680,13 @@
           </a:solidFill>
           <a:ln/>
         </p:spPr>
+        <p:txBody>
+          <a:bodyPr/>
+          <a:lstStyle/>
+          <a:p>
+            <a:endParaRPr lang="en-US"/>
+          </a:p>
+        </p:txBody>
       </p:sp>
       <p:sp>
         <p:nvSpPr>
@@ -11043,7 +11709,7 @@
           <a:bodyPr wrap="square" rtlCol="0" anchor="ctr"/>
           <a:lstStyle/>
           <a:p>
-            <a:pPr indent="0" marL="0">
+            <a:pPr marL="0" indent="0">
               <a:buNone/>
             </a:pPr>
             <a:r>
@@ -11082,7 +11748,7 @@
           <a:bodyPr wrap="square" rtlCol="0" anchor="ctr"/>
           <a:lstStyle/>
           <a:p>
-            <a:pPr algn="r" indent="0" marL="0">
+            <a:pPr marL="0" indent="0" algn="r">
               <a:buNone/>
             </a:pPr>
             <a:r>
@@ -11121,6 +11787,13 @@
             <a:prstDash val="solid"/>
           </a:ln>
         </p:spPr>
+        <p:txBody>
+          <a:bodyPr/>
+          <a:lstStyle/>
+          <a:p>
+            <a:endParaRPr lang="en-US"/>
+          </a:p>
+        </p:txBody>
       </p:sp>
       <p:sp>
         <p:nvSpPr>
@@ -11141,6 +11814,13 @@
           </a:solidFill>
           <a:ln/>
         </p:spPr>
+        <p:txBody>
+          <a:bodyPr/>
+          <a:lstStyle/>
+          <a:p>
+            <a:endParaRPr lang="en-US"/>
+          </a:p>
+        </p:txBody>
       </p:sp>
       <p:sp>
         <p:nvSpPr>
@@ -11163,7 +11843,7 @@
           <a:bodyPr wrap="square" rtlCol="0" anchor="ctr"/>
           <a:lstStyle/>
           <a:p>
-            <a:pPr indent="0" marL="0">
+            <a:pPr marL="0" indent="0">
               <a:buNone/>
             </a:pPr>
             <a:r>
@@ -11202,7 +11882,7 @@
           <a:bodyPr wrap="square" rtlCol="0" anchor="ctr"/>
           <a:lstStyle/>
           <a:p>
-            <a:pPr algn="r" indent="0" marL="0">
+            <a:pPr marL="0" indent="0" algn="r">
               <a:buNone/>
             </a:pPr>
             <a:r>
@@ -11243,6 +11923,13 @@
             <a:prstDash val="solid"/>
           </a:ln>
         </p:spPr>
+        <p:txBody>
+          <a:bodyPr/>
+          <a:lstStyle/>
+          <a:p>
+            <a:endParaRPr lang="en-US"/>
+          </a:p>
+        </p:txBody>
       </p:sp>
       <p:sp>
         <p:nvSpPr>
@@ -11265,7 +11952,7 @@
           <a:bodyPr wrap="square" lIns="0" tIns="0" rIns="0" bIns="0" rtlCol="0" anchor="ctr"/>
           <a:lstStyle/>
           <a:p>
-            <a:pPr indent="0" marL="0">
+            <a:pPr marL="0" indent="0">
               <a:buNone/>
             </a:pPr>
             <a:r>
@@ -11301,7 +11988,7 @@
           <a:bodyPr wrap="square" lIns="0" tIns="0" rIns="0" bIns="0" rtlCol="0" anchor="ctr"/>
           <a:lstStyle/>
           <a:p>
-            <a:pPr algn="r" indent="0" marL="0">
+            <a:pPr marL="0" indent="0" algn="r">
               <a:buNone/>
             </a:pPr>
             <a:r>
@@ -11332,6 +12019,7 @@
         <a:solidFill>
           <a:srgbClr val="F6F8FA"/>
         </a:solidFill>
+        <a:effectLst/>
       </p:bgPr>
     </p:bg>
     <p:spTree>
@@ -11367,6 +12055,13 @@
           </a:solidFill>
           <a:ln/>
         </p:spPr>
+        <p:txBody>
+          <a:bodyPr/>
+          <a:lstStyle/>
+          <a:p>
+            <a:endParaRPr lang="en-US"/>
+          </a:p>
+        </p:txBody>
       </p:sp>
       <p:sp>
         <p:nvSpPr>
@@ -11389,11 +12084,11 @@
           <a:bodyPr wrap="square" lIns="0" tIns="0" rIns="0" bIns="0" rtlCol="0" anchor="ctr"/>
           <a:lstStyle/>
           <a:p>
-            <a:pPr indent="0" marL="0">
-              <a:buNone/>
-            </a:pPr>
-            <a:r>
-              <a:rPr lang="en-US" sz="1300" b="1" spc="300" kern="0" dirty="0">
+            <a:pPr marL="0" indent="0">
+              <a:buNone/>
+            </a:pPr>
+            <a:r>
+              <a:rPr lang="en-US" sz="1300" b="1" kern="0" spc="300" dirty="0">
                 <a:solidFill>
                   <a:srgbClr val="FFFFFF"/>
                 </a:solidFill>
@@ -11425,7 +12120,7 @@
           <a:bodyPr wrap="square" rtlCol="0" anchor="ctr"/>
           <a:lstStyle/>
           <a:p>
-            <a:pPr indent="0" marL="0">
+            <a:pPr marL="0" indent="0">
               <a:buNone/>
             </a:pPr>
             <a:r>
@@ -11467,13 +12162,20 @@
             <a:prstDash val="solid"/>
           </a:ln>
           <a:effectLst>
-            <a:outerShdw sx="100000" sy="100000" kx="0" ky="0" algn="bl" rotWithShape="0" blurRad="101600" dist="38100" dir="8100000">
+            <a:outerShdw blurRad="101600" dist="38100" dir="8100000" algn="bl" rotWithShape="0">
               <a:srgbClr val="000000">
                 <a:alpha val="18000"/>
               </a:srgbClr>
             </a:outerShdw>
           </a:effectLst>
         </p:spPr>
+        <p:txBody>
+          <a:bodyPr/>
+          <a:lstStyle/>
+          <a:p>
+            <a:endParaRPr lang="en-US"/>
+          </a:p>
+        </p:txBody>
       </p:sp>
       <p:sp>
         <p:nvSpPr>
@@ -11494,6 +12196,13 @@
           </a:solidFill>
           <a:ln/>
         </p:spPr>
+        <p:txBody>
+          <a:bodyPr/>
+          <a:lstStyle/>
+          <a:p>
+            <a:endParaRPr lang="en-US"/>
+          </a:p>
+        </p:txBody>
       </p:sp>
       <p:sp>
         <p:nvSpPr>
@@ -11514,6 +12223,13 @@
           </a:solidFill>
           <a:ln/>
         </p:spPr>
+        <p:txBody>
+          <a:bodyPr/>
+          <a:lstStyle/>
+          <a:p>
+            <a:endParaRPr lang="en-US"/>
+          </a:p>
+        </p:txBody>
       </p:sp>
       <p:sp>
         <p:nvSpPr>
@@ -11536,7 +12252,7 @@
           <a:bodyPr wrap="square" lIns="0" tIns="0" rIns="0" bIns="0" rtlCol="0" anchor="ctr"/>
           <a:lstStyle/>
           <a:p>
-            <a:pPr algn="ctr" indent="0" marL="0">
+            <a:pPr marL="0" indent="0" algn="ctr">
               <a:buNone/>
             </a:pPr>
             <a:r>
@@ -11572,7 +12288,7 @@
           <a:bodyPr wrap="square" rtlCol="0" anchor="ctr"/>
           <a:lstStyle/>
           <a:p>
-            <a:pPr indent="0" marL="0">
+            <a:pPr marL="0" indent="0">
               <a:buNone/>
             </a:pPr>
             <a:r>
@@ -11611,7 +12327,7 @@
           <a:bodyPr wrap="square" rtlCol="0" anchor="ctr"/>
           <a:lstStyle/>
           <a:p>
-            <a:pPr algn="r" indent="0" marL="0">
+            <a:pPr marL="0" indent="0" algn="r">
               <a:buNone/>
             </a:pPr>
             <a:r>
@@ -11647,7 +12363,7 @@
           <a:bodyPr wrap="square" rtlCol="0" anchor="ctr"/>
           <a:lstStyle/>
           <a:p>
-            <a:pPr indent="0" marL="0">
+            <a:pPr marL="0" indent="0">
               <a:buNone/>
             </a:pPr>
             <a:r>
@@ -11689,13 +12405,20 @@
             <a:prstDash val="solid"/>
           </a:ln>
           <a:effectLst>
-            <a:outerShdw sx="100000" sy="100000" kx="0" ky="0" algn="bl" rotWithShape="0" blurRad="101600" dist="38100" dir="8100000">
+            <a:outerShdw blurRad="101600" dist="38100" dir="8100000" algn="bl" rotWithShape="0">
               <a:srgbClr val="000000">
                 <a:alpha val="18000"/>
               </a:srgbClr>
             </a:outerShdw>
           </a:effectLst>
         </p:spPr>
+        <p:txBody>
+          <a:bodyPr/>
+          <a:lstStyle/>
+          <a:p>
+            <a:endParaRPr lang="en-US"/>
+          </a:p>
+        </p:txBody>
       </p:sp>
       <p:sp>
         <p:nvSpPr>
@@ -11716,6 +12439,13 @@
           </a:solidFill>
           <a:ln/>
         </p:spPr>
+        <p:txBody>
+          <a:bodyPr/>
+          <a:lstStyle/>
+          <a:p>
+            <a:endParaRPr lang="en-US"/>
+          </a:p>
+        </p:txBody>
       </p:sp>
       <p:sp>
         <p:nvSpPr>
@@ -11736,6 +12466,13 @@
           </a:solidFill>
           <a:ln/>
         </p:spPr>
+        <p:txBody>
+          <a:bodyPr/>
+          <a:lstStyle/>
+          <a:p>
+            <a:endParaRPr lang="en-US"/>
+          </a:p>
+        </p:txBody>
       </p:sp>
       <p:sp>
         <p:nvSpPr>
@@ -11758,7 +12495,7 @@
           <a:bodyPr wrap="square" lIns="0" tIns="0" rIns="0" bIns="0" rtlCol="0" anchor="ctr"/>
           <a:lstStyle/>
           <a:p>
-            <a:pPr algn="ctr" indent="0" marL="0">
+            <a:pPr marL="0" indent="0" algn="ctr">
               <a:buNone/>
             </a:pPr>
             <a:r>
@@ -11794,7 +12531,7 @@
           <a:bodyPr wrap="square" rtlCol="0" anchor="ctr"/>
           <a:lstStyle/>
           <a:p>
-            <a:pPr indent="0" marL="0">
+            <a:pPr marL="0" indent="0">
               <a:buNone/>
             </a:pPr>
             <a:r>
@@ -11833,7 +12570,7 @@
           <a:bodyPr wrap="square" rtlCol="0" anchor="ctr"/>
           <a:lstStyle/>
           <a:p>
-            <a:pPr algn="r" indent="0" marL="0">
+            <a:pPr marL="0" indent="0" algn="r">
               <a:buNone/>
             </a:pPr>
             <a:r>
@@ -11869,7 +12606,7 @@
           <a:bodyPr wrap="square" rtlCol="0" anchor="ctr"/>
           <a:lstStyle/>
           <a:p>
-            <a:pPr indent="0" marL="0">
+            <a:pPr marL="0" indent="0">
               <a:buNone/>
             </a:pPr>
             <a:r>
@@ -11911,13 +12648,20 @@
             <a:prstDash val="solid"/>
           </a:ln>
           <a:effectLst>
-            <a:outerShdw sx="100000" sy="100000" kx="0" ky="0" algn="bl" rotWithShape="0" blurRad="101600" dist="38100" dir="8100000">
+            <a:outerShdw blurRad="101600" dist="38100" dir="8100000" algn="bl" rotWithShape="0">
               <a:srgbClr val="000000">
                 <a:alpha val="18000"/>
               </a:srgbClr>
             </a:outerShdw>
           </a:effectLst>
         </p:spPr>
+        <p:txBody>
+          <a:bodyPr/>
+          <a:lstStyle/>
+          <a:p>
+            <a:endParaRPr lang="en-US"/>
+          </a:p>
+        </p:txBody>
       </p:sp>
       <p:sp>
         <p:nvSpPr>
@@ -11938,6 +12682,13 @@
           </a:solidFill>
           <a:ln/>
         </p:spPr>
+        <p:txBody>
+          <a:bodyPr/>
+          <a:lstStyle/>
+          <a:p>
+            <a:endParaRPr lang="en-US"/>
+          </a:p>
+        </p:txBody>
       </p:sp>
       <p:sp>
         <p:nvSpPr>
@@ -11958,6 +12709,13 @@
           </a:solidFill>
           <a:ln/>
         </p:spPr>
+        <p:txBody>
+          <a:bodyPr/>
+          <a:lstStyle/>
+          <a:p>
+            <a:endParaRPr lang="en-US"/>
+          </a:p>
+        </p:txBody>
       </p:sp>
       <p:sp>
         <p:nvSpPr>
@@ -11980,7 +12738,7 @@
           <a:bodyPr wrap="square" lIns="0" tIns="0" rIns="0" bIns="0" rtlCol="0" anchor="ctr"/>
           <a:lstStyle/>
           <a:p>
-            <a:pPr algn="ctr" indent="0" marL="0">
+            <a:pPr marL="0" indent="0" algn="ctr">
               <a:buNone/>
             </a:pPr>
             <a:r>
@@ -12016,7 +12774,7 @@
           <a:bodyPr wrap="square" rtlCol="0" anchor="ctr"/>
           <a:lstStyle/>
           <a:p>
-            <a:pPr indent="0" marL="0">
+            <a:pPr marL="0" indent="0">
               <a:buNone/>
             </a:pPr>
             <a:r>
@@ -12055,7 +12813,7 @@
           <a:bodyPr wrap="square" rtlCol="0" anchor="ctr"/>
           <a:lstStyle/>
           <a:p>
-            <a:pPr algn="r" indent="0" marL="0">
+            <a:pPr marL="0" indent="0" algn="r">
               <a:buNone/>
             </a:pPr>
             <a:r>
@@ -12091,7 +12849,7 @@
           <a:bodyPr wrap="square" rtlCol="0" anchor="ctr"/>
           <a:lstStyle/>
           <a:p>
-            <a:pPr indent="0" marL="0">
+            <a:pPr marL="0" indent="0">
               <a:buNone/>
             </a:pPr>
             <a:r>
@@ -12125,6 +12883,7 @@
         <a:solidFill>
           <a:srgbClr val="0D1117"/>
         </a:solidFill>
+        <a:effectLst/>
       </p:bgPr>
     </p:bg>
     <p:spTree>
@@ -12160,6 +12919,13 @@
           </a:solidFill>
           <a:ln/>
         </p:spPr>
+        <p:txBody>
+          <a:bodyPr/>
+          <a:lstStyle/>
+          <a:p>
+            <a:endParaRPr lang="en-US"/>
+          </a:p>
+        </p:txBody>
       </p:sp>
       <p:sp>
         <p:nvSpPr>
@@ -12182,11 +12948,11 @@
           <a:bodyPr wrap="square" lIns="0" tIns="0" rIns="0" bIns="0" rtlCol="0" anchor="ctr"/>
           <a:lstStyle/>
           <a:p>
-            <a:pPr indent="0" marL="0">
-              <a:buNone/>
-            </a:pPr>
-            <a:r>
-              <a:rPr lang="en-US" sz="1300" b="1" spc="300" kern="0" dirty="0">
+            <a:pPr marL="0" indent="0">
+              <a:buNone/>
+            </a:pPr>
+            <a:r>
+              <a:rPr lang="en-US" sz="1300" b="1" kern="0" spc="300" dirty="0">
                 <a:solidFill>
                   <a:srgbClr val="FFFFFF"/>
                 </a:solidFill>
@@ -12218,7 +12984,7 @@
           <a:bodyPr wrap="square" lIns="0" tIns="0" rIns="0" bIns="0" rtlCol="0" anchor="ctr"/>
           <a:lstStyle/>
           <a:p>
-            <a:pPr algn="r" indent="0" marL="0">
+            <a:pPr marL="0" indent="0" algn="r">
               <a:buNone/>
             </a:pPr>
             <a:r>
@@ -12257,6 +13023,13 @@
             <a:prstDash val="solid"/>
           </a:ln>
         </p:spPr>
+        <p:txBody>
+          <a:bodyPr/>
+          <a:lstStyle/>
+          <a:p>
+            <a:endParaRPr lang="en-US"/>
+          </a:p>
+        </p:txBody>
       </p:sp>
       <p:sp>
         <p:nvSpPr>
@@ -12277,6 +13050,13 @@
           </a:solidFill>
           <a:ln/>
         </p:spPr>
+        <p:txBody>
+          <a:bodyPr/>
+          <a:lstStyle/>
+          <a:p>
+            <a:endParaRPr lang="en-US"/>
+          </a:p>
+        </p:txBody>
       </p:sp>
       <p:sp>
         <p:nvSpPr>
@@ -12299,11 +13079,11 @@
           <a:bodyPr wrap="square" lIns="0" tIns="0" rIns="0" bIns="0" rtlCol="0" anchor="ctr"/>
           <a:lstStyle/>
           <a:p>
-            <a:pPr indent="0" marL="0">
-              <a:buNone/>
-            </a:pPr>
-            <a:r>
-              <a:rPr lang="en-US" sz="1000" b="1" spc="100" kern="0" dirty="0">
+            <a:pPr marL="0" indent="0">
+              <a:buNone/>
+            </a:pPr>
+            <a:r>
+              <a:rPr lang="en-US" sz="1000" b="1" kern="0" spc="100" dirty="0">
                 <a:solidFill>
                   <a:srgbClr val="FFFFFF"/>
                 </a:solidFill>
@@ -12335,7 +13115,7 @@
           <a:bodyPr wrap="square" rtlCol="0" anchor="ctr"/>
           <a:lstStyle/>
           <a:p>
-            <a:pPr indent="0" marL="0">
+            <a:pPr marL="0" indent="0">
               <a:buNone/>
             </a:pPr>
             <a:r>
@@ -12374,7 +13154,7 @@
           <a:bodyPr wrap="square" rtlCol="0" anchor="ctr"/>
           <a:lstStyle/>
           <a:p>
-            <a:pPr indent="0" marL="0">
+            <a:pPr marL="0" indent="0">
               <a:buNone/>
             </a:pPr>
             <a:r>
@@ -12416,6 +13196,13 @@
             <a:prstDash val="solid"/>
           </a:ln>
         </p:spPr>
+        <p:txBody>
+          <a:bodyPr/>
+          <a:lstStyle/>
+          <a:p>
+            <a:endParaRPr lang="en-US"/>
+          </a:p>
+        </p:txBody>
       </p:sp>
       <p:sp>
         <p:nvSpPr>
@@ -12436,6 +13223,13 @@
           </a:solidFill>
           <a:ln/>
         </p:spPr>
+        <p:txBody>
+          <a:bodyPr/>
+          <a:lstStyle/>
+          <a:p>
+            <a:endParaRPr lang="en-US"/>
+          </a:p>
+        </p:txBody>
       </p:sp>
       <p:sp>
         <p:nvSpPr>
@@ -12458,11 +13252,11 @@
           <a:bodyPr wrap="square" lIns="0" tIns="0" rIns="0" bIns="0" rtlCol="0" anchor="ctr"/>
           <a:lstStyle/>
           <a:p>
-            <a:pPr indent="0" marL="0">
-              <a:buNone/>
-            </a:pPr>
-            <a:r>
-              <a:rPr lang="en-US" sz="1000" b="1" spc="100" kern="0" dirty="0">
+            <a:pPr marL="0" indent="0">
+              <a:buNone/>
+            </a:pPr>
+            <a:r>
+              <a:rPr lang="en-US" sz="1000" b="1" kern="0" spc="100" dirty="0">
                 <a:solidFill>
                   <a:srgbClr val="FFFFFF"/>
                 </a:solidFill>
@@ -12494,7 +13288,7 @@
           <a:bodyPr wrap="square" rtlCol="0" anchor="ctr"/>
           <a:lstStyle/>
           <a:p>
-            <a:pPr indent="0" marL="0">
+            <a:pPr marL="0" indent="0">
               <a:buNone/>
             </a:pPr>
             <a:r>
@@ -12533,7 +13327,7 @@
           <a:bodyPr wrap="square" rtlCol="0" anchor="ctr"/>
           <a:lstStyle/>
           <a:p>
-            <a:pPr indent="0" marL="0">
+            <a:pPr marL="0" indent="0">
               <a:buNone/>
             </a:pPr>
             <a:r>
@@ -12575,6 +13369,13 @@
             <a:prstDash val="solid"/>
           </a:ln>
         </p:spPr>
+        <p:txBody>
+          <a:bodyPr/>
+          <a:lstStyle/>
+          <a:p>
+            <a:endParaRPr lang="en-US"/>
+          </a:p>
+        </p:txBody>
       </p:sp>
       <p:sp>
         <p:nvSpPr>
@@ -12595,6 +13396,13 @@
           </a:solidFill>
           <a:ln/>
         </p:spPr>
+        <p:txBody>
+          <a:bodyPr/>
+          <a:lstStyle/>
+          <a:p>
+            <a:endParaRPr lang="en-US"/>
+          </a:p>
+        </p:txBody>
       </p:sp>
       <p:sp>
         <p:nvSpPr>
@@ -12617,11 +13425,11 @@
           <a:bodyPr wrap="square" lIns="0" tIns="0" rIns="0" bIns="0" rtlCol="0" anchor="ctr"/>
           <a:lstStyle/>
           <a:p>
-            <a:pPr indent="0" marL="0">
-              <a:buNone/>
-            </a:pPr>
-            <a:r>
-              <a:rPr lang="en-US" sz="1000" b="1" spc="100" kern="0" dirty="0">
+            <a:pPr marL="0" indent="0">
+              <a:buNone/>
+            </a:pPr>
+            <a:r>
+              <a:rPr lang="en-US" sz="1000" b="1" kern="0" spc="100" dirty="0">
                 <a:solidFill>
                   <a:srgbClr val="FFFFFF"/>
                 </a:solidFill>
@@ -12653,7 +13461,7 @@
           <a:bodyPr wrap="square" rtlCol="0" anchor="ctr"/>
           <a:lstStyle/>
           <a:p>
-            <a:pPr indent="0" marL="0">
+            <a:pPr marL="0" indent="0">
               <a:buNone/>
             </a:pPr>
             <a:r>
@@ -12692,7 +13500,7 @@
           <a:bodyPr wrap="square" rtlCol="0" anchor="ctr"/>
           <a:lstStyle/>
           <a:p>
-            <a:pPr indent="0" marL="0">
+            <a:pPr marL="0" indent="0">
               <a:buNone/>
             </a:pPr>
             <a:r>
@@ -12734,6 +13542,13 @@
             <a:prstDash val="solid"/>
           </a:ln>
         </p:spPr>
+        <p:txBody>
+          <a:bodyPr/>
+          <a:lstStyle/>
+          <a:p>
+            <a:endParaRPr lang="en-US"/>
+          </a:p>
+        </p:txBody>
       </p:sp>
       <p:sp>
         <p:nvSpPr>
@@ -12754,6 +13569,13 @@
           </a:solidFill>
           <a:ln/>
         </p:spPr>
+        <p:txBody>
+          <a:bodyPr/>
+          <a:lstStyle/>
+          <a:p>
+            <a:endParaRPr lang="en-US"/>
+          </a:p>
+        </p:txBody>
       </p:sp>
       <p:sp>
         <p:nvSpPr>
@@ -12776,11 +13598,11 @@
           <a:bodyPr wrap="square" lIns="0" tIns="0" rIns="0" bIns="0" rtlCol="0" anchor="ctr"/>
           <a:lstStyle/>
           <a:p>
-            <a:pPr indent="0" marL="0">
-              <a:buNone/>
-            </a:pPr>
-            <a:r>
-              <a:rPr lang="en-US" sz="1000" b="1" spc="100" kern="0" dirty="0">
+            <a:pPr marL="0" indent="0">
+              <a:buNone/>
+            </a:pPr>
+            <a:r>
+              <a:rPr lang="en-US" sz="1000" b="1" kern="0" spc="100" dirty="0">
                 <a:solidFill>
                   <a:srgbClr val="FFFFFF"/>
                 </a:solidFill>
@@ -12812,7 +13634,7 @@
           <a:bodyPr wrap="square" rtlCol="0" anchor="ctr"/>
           <a:lstStyle/>
           <a:p>
-            <a:pPr indent="0" marL="0">
+            <a:pPr marL="0" indent="0">
               <a:buNone/>
             </a:pPr>
             <a:r>
@@ -12851,7 +13673,7 @@
           <a:bodyPr wrap="square" rtlCol="0" anchor="ctr"/>
           <a:lstStyle/>
           <a:p>
-            <a:pPr indent="0" marL="0">
+            <a:pPr marL="0" indent="0">
               <a:buNone/>
             </a:pPr>
             <a:r>
@@ -12893,6 +13715,13 @@
             <a:prstDash val="solid"/>
           </a:ln>
         </p:spPr>
+        <p:txBody>
+          <a:bodyPr/>
+          <a:lstStyle/>
+          <a:p>
+            <a:endParaRPr lang="en-US"/>
+          </a:p>
+        </p:txBody>
       </p:sp>
       <p:sp>
         <p:nvSpPr>
@@ -12913,6 +13742,13 @@
           </a:solidFill>
           <a:ln/>
         </p:spPr>
+        <p:txBody>
+          <a:bodyPr/>
+          <a:lstStyle/>
+          <a:p>
+            <a:endParaRPr lang="en-US"/>
+          </a:p>
+        </p:txBody>
       </p:sp>
       <p:sp>
         <p:nvSpPr>
@@ -12935,11 +13771,11 @@
           <a:bodyPr wrap="square" lIns="0" tIns="0" rIns="0" bIns="0" rtlCol="0" anchor="ctr"/>
           <a:lstStyle/>
           <a:p>
-            <a:pPr indent="0" marL="0">
-              <a:buNone/>
-            </a:pPr>
-            <a:r>
-              <a:rPr lang="en-US" sz="1000" b="1" spc="100" kern="0" dirty="0">
+            <a:pPr marL="0" indent="0">
+              <a:buNone/>
+            </a:pPr>
+            <a:r>
+              <a:rPr lang="en-US" sz="1000" b="1" kern="0" spc="100" dirty="0">
                 <a:solidFill>
                   <a:srgbClr val="FFFFFF"/>
                 </a:solidFill>
@@ -12971,7 +13807,7 @@
           <a:bodyPr wrap="square" rtlCol="0" anchor="ctr"/>
           <a:lstStyle/>
           <a:p>
-            <a:pPr indent="0" marL="0">
+            <a:pPr marL="0" indent="0">
               <a:buNone/>
             </a:pPr>
             <a:r>
@@ -13010,7 +13846,7 @@
           <a:bodyPr wrap="square" rtlCol="0" anchor="ctr"/>
           <a:lstStyle/>
           <a:p>
-            <a:pPr indent="0" marL="0">
+            <a:pPr marL="0" indent="0">
               <a:buNone/>
             </a:pPr>
             <a:r>
@@ -13052,6 +13888,13 @@
             <a:prstDash val="solid"/>
           </a:ln>
         </p:spPr>
+        <p:txBody>
+          <a:bodyPr/>
+          <a:lstStyle/>
+          <a:p>
+            <a:endParaRPr lang="en-US"/>
+          </a:p>
+        </p:txBody>
       </p:sp>
       <p:sp>
         <p:nvSpPr>
@@ -13072,6 +13915,13 @@
           </a:solidFill>
           <a:ln/>
         </p:spPr>
+        <p:txBody>
+          <a:bodyPr/>
+          <a:lstStyle/>
+          <a:p>
+            <a:endParaRPr lang="en-US"/>
+          </a:p>
+        </p:txBody>
       </p:sp>
       <p:sp>
         <p:nvSpPr>
@@ -13094,11 +13944,11 @@
           <a:bodyPr wrap="square" lIns="0" tIns="0" rIns="0" bIns="0" rtlCol="0" anchor="ctr"/>
           <a:lstStyle/>
           <a:p>
-            <a:pPr indent="0" marL="0">
-              <a:buNone/>
-            </a:pPr>
-            <a:r>
-              <a:rPr lang="en-US" sz="1000" b="1" spc="100" kern="0" dirty="0">
+            <a:pPr marL="0" indent="0">
+              <a:buNone/>
+            </a:pPr>
+            <a:r>
+              <a:rPr lang="en-US" sz="1000" b="1" kern="0" spc="100" dirty="0">
                 <a:solidFill>
                   <a:srgbClr val="FFFFFF"/>
                 </a:solidFill>
@@ -13130,7 +13980,7 @@
           <a:bodyPr wrap="square" rtlCol="0" anchor="ctr"/>
           <a:lstStyle/>
           <a:p>
-            <a:pPr indent="0" marL="0">
+            <a:pPr marL="0" indent="0">
               <a:buNone/>
             </a:pPr>
             <a:r>
@@ -13169,7 +14019,7 @@
           <a:bodyPr wrap="square" rtlCol="0" anchor="ctr"/>
           <a:lstStyle/>
           <a:p>
-            <a:pPr indent="0" marL="0">
+            <a:pPr marL="0" indent="0">
               <a:buNone/>
             </a:pPr>
             <a:r>
@@ -13203,6 +14053,7 @@
         <a:solidFill>
           <a:srgbClr val="0D1117"/>
         </a:solidFill>
+        <a:effectLst/>
       </p:bgPr>
     </p:bg>
     <p:spTree>
@@ -13238,6 +14089,13 @@
           </a:solidFill>
           <a:ln/>
         </p:spPr>
+        <p:txBody>
+          <a:bodyPr/>
+          <a:lstStyle/>
+          <a:p>
+            <a:endParaRPr lang="en-US"/>
+          </a:p>
+        </p:txBody>
       </p:sp>
       <p:sp>
         <p:nvSpPr>
@@ -13260,6 +14118,13 @@
           </a:solidFill>
           <a:ln/>
         </p:spPr>
+        <p:txBody>
+          <a:bodyPr/>
+          <a:lstStyle/>
+          <a:p>
+            <a:endParaRPr lang="en-US"/>
+          </a:p>
+        </p:txBody>
       </p:sp>
       <p:sp>
         <p:nvSpPr>
@@ -13282,6 +14147,13 @@
           </a:solidFill>
           <a:ln/>
         </p:spPr>
+        <p:txBody>
+          <a:bodyPr/>
+          <a:lstStyle/>
+          <a:p>
+            <a:endParaRPr lang="en-US"/>
+          </a:p>
+        </p:txBody>
       </p:sp>
       <p:sp>
         <p:nvSpPr>
@@ -13304,7 +14176,7 @@
           <a:bodyPr wrap="square" rtlCol="0" anchor="ctr"/>
           <a:lstStyle/>
           <a:p>
-            <a:pPr indent="0" marL="0">
+            <a:pPr marL="0" indent="0">
               <a:buNone/>
             </a:pPr>
             <a:r>
@@ -13343,7 +14215,7 @@
           <a:bodyPr wrap="square" rtlCol="0" anchor="ctr"/>
           <a:lstStyle/>
           <a:p>
-            <a:pPr indent="0" marL="0">
+            <a:pPr marL="0" indent="0">
               <a:buNone/>
             </a:pPr>
             <a:r>
@@ -13387,6 +14259,13 @@
             <a:prstDash val="solid"/>
           </a:ln>
         </p:spPr>
+        <p:txBody>
+          <a:bodyPr/>
+          <a:lstStyle/>
+          <a:p>
+            <a:endParaRPr lang="en-US"/>
+          </a:p>
+        </p:txBody>
       </p:sp>
       <p:sp>
         <p:nvSpPr>
@@ -13409,7 +14288,7 @@
           <a:bodyPr wrap="square" rtlCol="0" anchor="ctr"/>
           <a:lstStyle/>
           <a:p>
-            <a:pPr algn="ctr" indent="0" marL="0">
+            <a:pPr marL="0" indent="0" algn="ctr">
               <a:buNone/>
             </a:pPr>
             <a:r>
@@ -13445,11 +14324,11 @@
           <a:bodyPr wrap="square" rtlCol="0" anchor="ctr"/>
           <a:lstStyle/>
           <a:p>
-            <a:pPr algn="ctr" indent="0" marL="0">
-              <a:buNone/>
-            </a:pPr>
-            <a:r>
-              <a:rPr lang="en-US" sz="1000" b="1" spc="100" kern="0" dirty="0">
+            <a:pPr marL="0" indent="0" algn="ctr">
+              <a:buNone/>
+            </a:pPr>
+            <a:r>
+              <a:rPr lang="en-US" sz="1000" b="1" kern="0" spc="100" dirty="0">
                 <a:solidFill>
                   <a:srgbClr val="1A73E8"/>
                 </a:solidFill>
@@ -13481,7 +14360,7 @@
           <a:bodyPr wrap="square" rtlCol="0" anchor="ctr"/>
           <a:lstStyle/>
           <a:p>
-            <a:pPr algn="ctr" indent="0" marL="0">
+            <a:pPr marL="0" indent="0" algn="ctr">
               <a:buNone/>
             </a:pPr>
             <a:r>
@@ -13525,6 +14404,13 @@
             <a:prstDash val="solid"/>
           </a:ln>
         </p:spPr>
+        <p:txBody>
+          <a:bodyPr/>
+          <a:lstStyle/>
+          <a:p>
+            <a:endParaRPr lang="en-US"/>
+          </a:p>
+        </p:txBody>
       </p:sp>
       <p:sp>
         <p:nvSpPr>
@@ -13547,7 +14433,7 @@
           <a:bodyPr wrap="square" rtlCol="0" anchor="ctr"/>
           <a:lstStyle/>
           <a:p>
-            <a:pPr algn="ctr" indent="0" marL="0">
+            <a:pPr marL="0" indent="0" algn="ctr">
               <a:buNone/>
             </a:pPr>
             <a:r>
@@ -13583,11 +14469,11 @@
           <a:bodyPr wrap="square" rtlCol="0" anchor="ctr"/>
           <a:lstStyle/>
           <a:p>
-            <a:pPr algn="ctr" indent="0" marL="0">
-              <a:buNone/>
-            </a:pPr>
-            <a:r>
-              <a:rPr lang="en-US" sz="1000" b="1" spc="100" kern="0" dirty="0">
+            <a:pPr marL="0" indent="0" algn="ctr">
+              <a:buNone/>
+            </a:pPr>
+            <a:r>
+              <a:rPr lang="en-US" sz="1000" b="1" kern="0" spc="100" dirty="0">
                 <a:solidFill>
                   <a:srgbClr val="0F9D58"/>
                 </a:solidFill>
@@ -13619,7 +14505,7 @@
           <a:bodyPr wrap="square" rtlCol="0" anchor="ctr"/>
           <a:lstStyle/>
           <a:p>
-            <a:pPr algn="ctr" indent="0" marL="0">
+            <a:pPr marL="0" indent="0" algn="ctr">
               <a:buNone/>
             </a:pPr>
             <a:r>
@@ -13663,6 +14549,13 @@
             <a:prstDash val="solid"/>
           </a:ln>
         </p:spPr>
+        <p:txBody>
+          <a:bodyPr/>
+          <a:lstStyle/>
+          <a:p>
+            <a:endParaRPr lang="en-US"/>
+          </a:p>
+        </p:txBody>
       </p:sp>
       <p:sp>
         <p:nvSpPr>
@@ -13685,7 +14578,7 @@
           <a:bodyPr wrap="square" rtlCol="0" anchor="ctr"/>
           <a:lstStyle/>
           <a:p>
-            <a:pPr algn="ctr" indent="0" marL="0">
+            <a:pPr marL="0" indent="0" algn="ctr">
               <a:buNone/>
             </a:pPr>
             <a:r>
@@ -13721,11 +14614,11 @@
           <a:bodyPr wrap="square" rtlCol="0" anchor="ctr"/>
           <a:lstStyle/>
           <a:p>
-            <a:pPr algn="ctr" indent="0" marL="0">
-              <a:buNone/>
-            </a:pPr>
-            <a:r>
-              <a:rPr lang="en-US" sz="1000" b="1" spc="100" kern="0" dirty="0">
+            <a:pPr marL="0" indent="0" algn="ctr">
+              <a:buNone/>
+            </a:pPr>
+            <a:r>
+              <a:rPr lang="en-US" sz="1000" b="1" kern="0" spc="100" dirty="0">
                 <a:solidFill>
                   <a:srgbClr val="F4B400"/>
                 </a:solidFill>
@@ -13757,7 +14650,7 @@
           <a:bodyPr wrap="square" rtlCol="0" anchor="ctr"/>
           <a:lstStyle/>
           <a:p>
-            <a:pPr algn="ctr" indent="0" marL="0">
+            <a:pPr marL="0" indent="0" algn="ctr">
               <a:buNone/>
             </a:pPr>
             <a:r>
@@ -13801,6 +14694,13 @@
             <a:prstDash val="solid"/>
           </a:ln>
         </p:spPr>
+        <p:txBody>
+          <a:bodyPr/>
+          <a:lstStyle/>
+          <a:p>
+            <a:endParaRPr lang="en-US"/>
+          </a:p>
+        </p:txBody>
       </p:sp>
       <p:sp>
         <p:nvSpPr>
@@ -13823,7 +14723,7 @@
           <a:bodyPr wrap="square" rtlCol="0" anchor="ctr"/>
           <a:lstStyle/>
           <a:p>
-            <a:pPr algn="ctr" indent="0" marL="0">
+            <a:pPr marL="0" indent="0" algn="ctr">
               <a:buNone/>
             </a:pPr>
             <a:r>
@@ -13859,11 +14759,11 @@
           <a:bodyPr wrap="square" rtlCol="0" anchor="ctr"/>
           <a:lstStyle/>
           <a:p>
-            <a:pPr algn="ctr" indent="0" marL="0">
-              <a:buNone/>
-            </a:pPr>
-            <a:r>
-              <a:rPr lang="en-US" sz="1000" b="1" spc="100" kern="0" dirty="0">
+            <a:pPr marL="0" indent="0" algn="ctr">
+              <a:buNone/>
+            </a:pPr>
+            <a:r>
+              <a:rPr lang="en-US" sz="1000" b="1" kern="0" spc="100" dirty="0">
                 <a:solidFill>
                   <a:srgbClr val="DB4437"/>
                 </a:solidFill>
@@ -13895,7 +14795,7 @@
           <a:bodyPr wrap="square" rtlCol="0" anchor="ctr"/>
           <a:lstStyle/>
           <a:p>
-            <a:pPr algn="ctr" indent="0" marL="0">
+            <a:pPr marL="0" indent="0" algn="ctr">
               <a:buNone/>
             </a:pPr>
             <a:r>
@@ -13934,7 +14834,7 @@
           <a:bodyPr wrap="square" rtlCol="0" anchor="ctr"/>
           <a:lstStyle/>
           <a:p>
-            <a:pPr algn="ctr" indent="0" marL="0">
+            <a:pPr marL="0" indent="0" algn="ctr">
               <a:buNone/>
             </a:pPr>
             <a:r>
@@ -14250,4 +15150,319 @@
     </a:ext>
   </a:extLst>
 </a:theme>
+</file>
+
+<file path=ppt/theme/theme2.xml><?xml version="1.0" encoding="utf-8"?>
+<a:theme xmlns:a="http://schemas.openxmlformats.org/drawingml/2006/main" name="Office Theme">
+  <a:themeElements>
+    <a:clrScheme name="Office">
+      <a:dk1>
+        <a:sysClr val="windowText" lastClr="000000"/>
+      </a:dk1>
+      <a:lt1>
+        <a:sysClr val="window" lastClr="FFFFFF"/>
+      </a:lt1>
+      <a:dk2>
+        <a:srgbClr val="0E2841"/>
+      </a:dk2>
+      <a:lt2>
+        <a:srgbClr val="E8E8E8"/>
+      </a:lt2>
+      <a:accent1>
+        <a:srgbClr val="156082"/>
+      </a:accent1>
+      <a:accent2>
+        <a:srgbClr val="E97132"/>
+      </a:accent2>
+      <a:accent3>
+        <a:srgbClr val="196B24"/>
+      </a:accent3>
+      <a:accent4>
+        <a:srgbClr val="0F9ED5"/>
+      </a:accent4>
+      <a:accent5>
+        <a:srgbClr val="A02B93"/>
+      </a:accent5>
+      <a:accent6>
+        <a:srgbClr val="4EA72E"/>
+      </a:accent6>
+      <a:hlink>
+        <a:srgbClr val="467886"/>
+      </a:hlink>
+      <a:folHlink>
+        <a:srgbClr val="96607D"/>
+      </a:folHlink>
+    </a:clrScheme>
+    <a:fontScheme name="Office">
+      <a:majorFont>
+        <a:latin typeface="Aptos Display" panose="02110004020202020204"/>
+        <a:ea typeface=""/>
+        <a:cs typeface=""/>
+        <a:font script="Jpan" typeface="游ゴシック Light"/>
+        <a:font script="Hang" typeface="맑은 고딕"/>
+        <a:font script="Hans" typeface="等线 Light"/>
+        <a:font script="Hant" typeface="新細明體"/>
+        <a:font script="Arab" typeface="Times New Roman"/>
+        <a:font script="Hebr" typeface="Times New Roman"/>
+        <a:font script="Thai" typeface="Angsana New"/>
+        <a:font script="Ethi" typeface="Nyala"/>
+        <a:font script="Beng" typeface="Vrinda"/>
+        <a:font script="Gujr" typeface="Shruti"/>
+        <a:font script="Khmr" typeface="MoolBoran"/>
+        <a:font script="Knda" typeface="Tunga"/>
+        <a:font script="Guru" typeface="Raavi"/>
+        <a:font script="Cans" typeface="Euphemia"/>
+        <a:font script="Cher" typeface="Plantagenet Cherokee"/>
+        <a:font script="Yiii" typeface="Microsoft Yi Baiti"/>
+        <a:font script="Tibt" typeface="Microsoft Himalaya"/>
+        <a:font script="Thaa" typeface="MV Boli"/>
+        <a:font script="Deva" typeface="Mangal"/>
+        <a:font script="Telu" typeface="Gautami"/>
+        <a:font script="Taml" typeface="Latha"/>
+        <a:font script="Syrc" typeface="Estrangelo Edessa"/>
+        <a:font script="Orya" typeface="Kalinga"/>
+        <a:font script="Mlym" typeface="Kartika"/>
+        <a:font script="Laoo" typeface="DokChampa"/>
+        <a:font script="Sinh" typeface="Iskoola Pota"/>
+        <a:font script="Mong" typeface="Mongolian Baiti"/>
+        <a:font script="Viet" typeface="Times New Roman"/>
+        <a:font script="Uigh" typeface="Microsoft Uighur"/>
+        <a:font script="Geor" typeface="Sylfaen"/>
+        <a:font script="Armn" typeface="Arial"/>
+        <a:font script="Bugi" typeface="Leelawadee UI"/>
+        <a:font script="Bopo" typeface="Microsoft JhengHei"/>
+        <a:font script="Java" typeface="Javanese Text"/>
+        <a:font script="Lisu" typeface="Segoe UI"/>
+        <a:font script="Mymr" typeface="Myanmar Text"/>
+        <a:font script="Nkoo" typeface="Ebrima"/>
+        <a:font script="Olck" typeface="Nirmala UI"/>
+        <a:font script="Osma" typeface="Ebrima"/>
+        <a:font script="Phag" typeface="Phagspa"/>
+        <a:font script="Syrn" typeface="Estrangelo Edessa"/>
+        <a:font script="Syrj" typeface="Estrangelo Edessa"/>
+        <a:font script="Syre" typeface="Estrangelo Edessa"/>
+        <a:font script="Sora" typeface="Nirmala UI"/>
+        <a:font script="Tale" typeface="Microsoft Tai Le"/>
+        <a:font script="Talu" typeface="Microsoft New Tai Lue"/>
+        <a:font script="Tfng" typeface="Ebrima"/>
+      </a:majorFont>
+      <a:minorFont>
+        <a:latin typeface="Aptos" panose="02110004020202020204"/>
+        <a:ea typeface=""/>
+        <a:cs typeface=""/>
+        <a:font script="Jpan" typeface="游ゴシック"/>
+        <a:font script="Hang" typeface="맑은 고딕"/>
+        <a:font script="Hans" typeface="等线"/>
+        <a:font script="Hant" typeface="新細明體"/>
+        <a:font script="Arab" typeface="Arial"/>
+        <a:font script="Hebr" typeface="Arial"/>
+        <a:font script="Thai" typeface="Cordia New"/>
+        <a:font script="Ethi" typeface="Nyala"/>
+        <a:font script="Beng" typeface="Vrinda"/>
+        <a:font script="Gujr" typeface="Shruti"/>
+        <a:font script="Khmr" typeface="DaunPenh"/>
+        <a:font script="Knda" typeface="Tunga"/>
+        <a:font script="Guru" typeface="Raavi"/>
+        <a:font script="Cans" typeface="Euphemia"/>
+        <a:font script="Cher" typeface="Plantagenet Cherokee"/>
+        <a:font script="Yiii" typeface="Microsoft Yi Baiti"/>
+        <a:font script="Tibt" typeface="Microsoft Himalaya"/>
+        <a:font script="Thaa" typeface="MV Boli"/>
+        <a:font script="Deva" typeface="Mangal"/>
+        <a:font script="Telu" typeface="Gautami"/>
+        <a:font script="Taml" typeface="Latha"/>
+        <a:font script="Syrc" typeface="Estrangelo Edessa"/>
+        <a:font script="Orya" typeface="Kalinga"/>
+        <a:font script="Mlym" typeface="Kartika"/>
+        <a:font script="Laoo" typeface="DokChampa"/>
+        <a:font script="Sinh" typeface="Iskoola Pota"/>
+        <a:font script="Mong" typeface="Mongolian Baiti"/>
+        <a:font script="Viet" typeface="Arial"/>
+        <a:font script="Uigh" typeface="Microsoft Uighur"/>
+        <a:font script="Geor" typeface="Sylfaen"/>
+        <a:font script="Armn" typeface="Arial"/>
+        <a:font script="Bugi" typeface="Leelawadee UI"/>
+        <a:font script="Bopo" typeface="Microsoft JhengHei"/>
+        <a:font script="Java" typeface="Javanese Text"/>
+        <a:font script="Lisu" typeface="Segoe UI"/>
+        <a:font script="Mymr" typeface="Myanmar Text"/>
+        <a:font script="Nkoo" typeface="Ebrima"/>
+        <a:font script="Olck" typeface="Nirmala UI"/>
+        <a:font script="Osma" typeface="Ebrima"/>
+        <a:font script="Phag" typeface="Phagspa"/>
+        <a:font script="Syrn" typeface="Estrangelo Edessa"/>
+        <a:font script="Syrj" typeface="Estrangelo Edessa"/>
+        <a:font script="Syre" typeface="Estrangelo Edessa"/>
+        <a:font script="Sora" typeface="Nirmala UI"/>
+        <a:font script="Tale" typeface="Microsoft Tai Le"/>
+        <a:font script="Talu" typeface="Microsoft New Tai Lue"/>
+        <a:font script="Tfng" typeface="Ebrima"/>
+      </a:minorFont>
+    </a:fontScheme>
+    <a:fmtScheme name="Office">
+      <a:fillStyleLst>
+        <a:solidFill>
+          <a:schemeClr val="phClr"/>
+        </a:solidFill>
+        <a:gradFill rotWithShape="1">
+          <a:gsLst>
+            <a:gs pos="0">
+              <a:schemeClr val="phClr">
+                <a:lumMod val="110000"/>
+                <a:satMod val="105000"/>
+                <a:tint val="67000"/>
+              </a:schemeClr>
+            </a:gs>
+            <a:gs pos="50000">
+              <a:schemeClr val="phClr">
+                <a:lumMod val="105000"/>
+                <a:satMod val="103000"/>
+                <a:tint val="73000"/>
+              </a:schemeClr>
+            </a:gs>
+            <a:gs pos="100000">
+              <a:schemeClr val="phClr">
+                <a:lumMod val="105000"/>
+                <a:satMod val="109000"/>
+                <a:tint val="81000"/>
+              </a:schemeClr>
+            </a:gs>
+          </a:gsLst>
+          <a:lin ang="5400000" scaled="0"/>
+        </a:gradFill>
+        <a:gradFill rotWithShape="1">
+          <a:gsLst>
+            <a:gs pos="0">
+              <a:schemeClr val="phClr">
+                <a:satMod val="103000"/>
+                <a:lumMod val="102000"/>
+                <a:tint val="94000"/>
+              </a:schemeClr>
+            </a:gs>
+            <a:gs pos="50000">
+              <a:schemeClr val="phClr">
+                <a:satMod val="110000"/>
+                <a:lumMod val="100000"/>
+                <a:shade val="100000"/>
+              </a:schemeClr>
+            </a:gs>
+            <a:gs pos="100000">
+              <a:schemeClr val="phClr">
+                <a:lumMod val="99000"/>
+                <a:satMod val="120000"/>
+                <a:shade val="78000"/>
+              </a:schemeClr>
+            </a:gs>
+          </a:gsLst>
+          <a:lin ang="5400000" scaled="0"/>
+        </a:gradFill>
+      </a:fillStyleLst>
+      <a:lnStyleLst>
+        <a:ln w="12700" cap="flat" cmpd="sng" algn="ctr">
+          <a:solidFill>
+            <a:schemeClr val="phClr"/>
+          </a:solidFill>
+          <a:prstDash val="solid"/>
+          <a:miter lim="800000"/>
+        </a:ln>
+        <a:ln w="19050" cap="flat" cmpd="sng" algn="ctr">
+          <a:solidFill>
+            <a:schemeClr val="phClr"/>
+          </a:solidFill>
+          <a:prstDash val="solid"/>
+          <a:miter lim="800000"/>
+        </a:ln>
+        <a:ln w="25400" cap="flat" cmpd="sng" algn="ctr">
+          <a:solidFill>
+            <a:schemeClr val="phClr"/>
+          </a:solidFill>
+          <a:prstDash val="solid"/>
+          <a:miter lim="800000"/>
+        </a:ln>
+      </a:lnStyleLst>
+      <a:effectStyleLst>
+        <a:effectStyle>
+          <a:effectLst/>
+        </a:effectStyle>
+        <a:effectStyle>
+          <a:effectLst/>
+        </a:effectStyle>
+        <a:effectStyle>
+          <a:effectLst>
+            <a:outerShdw blurRad="57150" dist="19050" dir="5400000" algn="ctr" rotWithShape="0">
+              <a:srgbClr val="000000">
+                <a:alpha val="63000"/>
+              </a:srgbClr>
+            </a:outerShdw>
+          </a:effectLst>
+        </a:effectStyle>
+      </a:effectStyleLst>
+      <a:bgFillStyleLst>
+        <a:solidFill>
+          <a:schemeClr val="phClr"/>
+        </a:solidFill>
+        <a:solidFill>
+          <a:schemeClr val="phClr">
+            <a:tint val="95000"/>
+            <a:satMod val="170000"/>
+          </a:schemeClr>
+        </a:solidFill>
+        <a:gradFill rotWithShape="1">
+          <a:gsLst>
+            <a:gs pos="0">
+              <a:schemeClr val="phClr">
+                <a:tint val="93000"/>
+                <a:satMod val="150000"/>
+                <a:shade val="98000"/>
+                <a:lumMod val="102000"/>
+              </a:schemeClr>
+            </a:gs>
+            <a:gs pos="50000">
+              <a:schemeClr val="phClr">
+                <a:tint val="98000"/>
+                <a:satMod val="130000"/>
+                <a:shade val="90000"/>
+                <a:lumMod val="103000"/>
+              </a:schemeClr>
+            </a:gs>
+            <a:gs pos="100000">
+              <a:schemeClr val="phClr">
+                <a:shade val="63000"/>
+                <a:satMod val="120000"/>
+              </a:schemeClr>
+            </a:gs>
+          </a:gsLst>
+          <a:lin ang="5400000" scaled="0"/>
+        </a:gradFill>
+      </a:bgFillStyleLst>
+    </a:fmtScheme>
+  </a:themeElements>
+  <a:objectDefaults>
+    <a:lnDef>
+      <a:spPr/>
+      <a:bodyPr/>
+      <a:lstStyle/>
+      <a:style>
+        <a:lnRef idx="2">
+          <a:schemeClr val="accent1"/>
+        </a:lnRef>
+        <a:fillRef idx="0">
+          <a:schemeClr val="accent1"/>
+        </a:fillRef>
+        <a:effectRef idx="1">
+          <a:schemeClr val="accent1"/>
+        </a:effectRef>
+        <a:fontRef idx="minor">
+          <a:schemeClr val="tx1"/>
+        </a:fontRef>
+      </a:style>
+    </a:lnDef>
+  </a:objectDefaults>
+  <a:extraClrSchemeLst/>
+  <a:extLst>
+    <a:ext uri="{05A4C25C-085E-4340-85A3-A5531E510DB2}">
+      <thm15:themeFamily xmlns:thm15="http://schemas.microsoft.com/office/thememl/2012/main" name="Office Theme" id="{2E142A2C-CD16-42D6-873A-C26D2A0506FA}" vid="{1BDDFF52-6CD6-40A5-AB3C-68EB2F1E4D0A}"/>
+    </a:ext>
+  </a:extLst>
+</a:theme>
 </file>